--- a/exports/pptx/lessons/middle-module-08-yoga/day-09-project-session-2.pptx
+++ b/exports/pptx/lessons/middle-module-08-yoga/day-09-project-session-2.pptx
@@ -16,9 +16,11 @@
     <p:sldId id="264" r:id="rId10"/>
     <p:sldId id="265" r:id="rId11"/>
     <p:sldId id="266" r:id="rId12"/>
+    <p:sldId id="267" r:id="rId13"/>
+    <p:sldId id="268" r:id="rId14"/>
   </p:sldIdLst>
   <p:notesMasterIdLst>
-    <p:notesMasterId r:id="rId13"/>
+    <p:notesMasterId r:id="rId15"/>
   </p:notesMasterIdLst>
   <p:sldSz cx="9144000" cy="5143500"/>
   <p:notesSz cx="5143500" cy="9144000"/>
@@ -712,6 +714,182 @@
             <a:fld id="{F7021451-1387-4CA6-816F-3879F97B5CBC}" type="slidenum">
               <a:rPr lang="en-US"/>
               <a:t>11</a:t>
+            </a:fld>
+            <a:endParaRPr lang="en-US"/>
+          </a:p>
+        </p:txBody>
+      </p:sp>
+    </p:spTree>
+    <p:extLst>
+      <p:ext uri="{BB962C8B-B14F-4D97-AF65-F5344CB8AC3E}">
+        <p14:creationId xmlns:p14="http://schemas.microsoft.com/office/powerpoint/2010/main" val="1024086991"/>
+      </p:ext>
+    </p:extLst>
+  </p:cSld>
+  <p:clrMapOvr>
+    <a:masterClrMapping/>
+  </p:clrMapOvr>
+</p:notes>
+</file>
+
+<file path=ppt/notesSlides/notesSlide12.xml><?xml version="1.0" encoding="utf-8"?>
+<p:notes xmlns:a="http://schemas.openxmlformats.org/drawingml/2006/main" xmlns:r="http://schemas.openxmlformats.org/officeDocument/2006/relationships" xmlns:p="http://schemas.openxmlformats.org/presentationml/2006/main">
+  <p:cSld>
+    <p:spTree>
+      <p:nvGrpSpPr>
+        <p:cNvPr id="1" name=""/>
+        <p:cNvGrpSpPr/>
+        <p:nvPr/>
+      </p:nvGrpSpPr>
+      <p:grpSpPr>
+        <a:xfrm>
+          <a:off x="0" y="0"/>
+          <a:ext cx="0" cy="0"/>
+          <a:chOff x="0" y="0"/>
+          <a:chExt cx="0" cy="0"/>
+        </a:xfrm>
+      </p:grpSpPr>
+      <p:sp>
+        <p:nvSpPr>
+          <p:cNvPr id="2" name="Slide Image Placeholder 1"/>
+          <p:cNvSpPr>
+            <a:spLocks noGrp="1" noRot="1" noChangeAspect="1"/>
+          </p:cNvSpPr>
+          <p:nvPr>
+            <p:ph type="sldImg"/>
+          </p:nvPr>
+        </p:nvSpPr>
+        <p:spPr/>
+      </p:sp>
+      <p:sp>
+        <p:nvSpPr>
+          <p:cNvPr id="3" name="Notes Placeholder 2"/>
+          <p:cNvSpPr>
+            <a:spLocks noGrp="1"/>
+          </p:cNvSpPr>
+          <p:nvPr>
+            <p:ph type="body" idx="1"/>
+          </p:nvPr>
+        </p:nvSpPr>
+        <p:spPr/>
+        <p:txBody>
+          <a:bodyPr/>
+          <a:lstStyle/>
+          <a:p>
+            <a:r>
+              <a:rPr lang="en-US" dirty="0"/>
+              <a:t/>
+            </a:r>
+            <a:endParaRPr lang="en-US" dirty="0"/>
+          </a:p>
+        </p:txBody>
+      </p:sp>
+      <p:sp>
+        <p:nvSpPr>
+          <p:cNvPr id="4" name="Slide Number Placeholder 3"/>
+          <p:cNvSpPr>
+            <a:spLocks noGrp="1"/>
+          </p:cNvSpPr>
+          <p:nvPr>
+            <p:ph type="sldNum" sz="quarter" idx="10"/>
+          </p:nvPr>
+        </p:nvSpPr>
+        <p:spPr/>
+        <p:txBody>
+          <a:bodyPr/>
+          <a:lstStyle/>
+          <a:p>
+            <a:fld id="{F7021451-1387-4CA6-816F-3879F97B5CBC}" type="slidenum">
+              <a:rPr lang="en-US"/>
+              <a:t>12</a:t>
+            </a:fld>
+            <a:endParaRPr lang="en-US"/>
+          </a:p>
+        </p:txBody>
+      </p:sp>
+    </p:spTree>
+    <p:extLst>
+      <p:ext uri="{BB962C8B-B14F-4D97-AF65-F5344CB8AC3E}">
+        <p14:creationId xmlns:p14="http://schemas.microsoft.com/office/powerpoint/2010/main" val="1024086991"/>
+      </p:ext>
+    </p:extLst>
+  </p:cSld>
+  <p:clrMapOvr>
+    <a:masterClrMapping/>
+  </p:clrMapOvr>
+</p:notes>
+</file>
+
+<file path=ppt/notesSlides/notesSlide13.xml><?xml version="1.0" encoding="utf-8"?>
+<p:notes xmlns:a="http://schemas.openxmlformats.org/drawingml/2006/main" xmlns:r="http://schemas.openxmlformats.org/officeDocument/2006/relationships" xmlns:p="http://schemas.openxmlformats.org/presentationml/2006/main">
+  <p:cSld>
+    <p:spTree>
+      <p:nvGrpSpPr>
+        <p:cNvPr id="1" name=""/>
+        <p:cNvGrpSpPr/>
+        <p:nvPr/>
+      </p:nvGrpSpPr>
+      <p:grpSpPr>
+        <a:xfrm>
+          <a:off x="0" y="0"/>
+          <a:ext cx="0" cy="0"/>
+          <a:chOff x="0" y="0"/>
+          <a:chExt cx="0" cy="0"/>
+        </a:xfrm>
+      </p:grpSpPr>
+      <p:sp>
+        <p:nvSpPr>
+          <p:cNvPr id="2" name="Slide Image Placeholder 1"/>
+          <p:cNvSpPr>
+            <a:spLocks noGrp="1" noRot="1" noChangeAspect="1"/>
+          </p:cNvSpPr>
+          <p:nvPr>
+            <p:ph type="sldImg"/>
+          </p:nvPr>
+        </p:nvSpPr>
+        <p:spPr/>
+      </p:sp>
+      <p:sp>
+        <p:nvSpPr>
+          <p:cNvPr id="3" name="Notes Placeholder 2"/>
+          <p:cNvSpPr>
+            <a:spLocks noGrp="1"/>
+          </p:cNvSpPr>
+          <p:nvPr>
+            <p:ph type="body" idx="1"/>
+          </p:nvPr>
+        </p:nvSpPr>
+        <p:spPr/>
+        <p:txBody>
+          <a:bodyPr/>
+          <a:lstStyle/>
+          <a:p>
+            <a:r>
+              <a:rPr lang="en-US" dirty="0"/>
+              <a:t/>
+            </a:r>
+            <a:endParaRPr lang="en-US" dirty="0"/>
+          </a:p>
+        </p:txBody>
+      </p:sp>
+      <p:sp>
+        <p:nvSpPr>
+          <p:cNvPr id="4" name="Slide Number Placeholder 3"/>
+          <p:cNvSpPr>
+            <a:spLocks noGrp="1"/>
+          </p:cNvSpPr>
+          <p:nvPr>
+            <p:ph type="sldNum" sz="quarter" idx="10"/>
+          </p:nvPr>
+        </p:nvSpPr>
+        <p:spPr/>
+        <p:txBody>
+          <a:bodyPr/>
+          <a:lstStyle/>
+          <a:p>
+            <a:fld id="{F7021451-1387-4CA6-816F-3879F97B5CBC}" type="slidenum">
+              <a:rPr lang="en-US"/>
+              <a:t>13</a:t>
             </a:fld>
             <a:endParaRPr lang="en-US"/>
           </a:p>
@@ -2011,102 +2189,6 @@
         </p:nvSpPr>
         <p:spPr>
           <a:xfrm>
-            <a:off x="406301" y="1223963"/>
-            <a:ext cx="8498026" cy="274290"/>
-          </a:xfrm>
-          <a:prstGeom prst="rect">
-            <a:avLst/>
-          </a:prstGeom>
-          <a:noFill/>
-          <a:ln/>
-        </p:spPr>
-        <p:txBody>
-          <a:bodyPr wrap="square" lIns="0" tIns="0" rIns="0" bIns="0" rtlCol="0" anchor="t"/>
-          <a:lstStyle/>
-          <a:p>
-            <a:pPr algn="l" indent="0" marL="0">
-              <a:lnSpc>
-                <a:spcPts val="2160"/>
-              </a:lnSpc>
-              <a:spcBef>
-                <a:spcPts val="600"/>
-              </a:spcBef>
-              <a:spcAft>
-                <a:spcPts val="800"/>
-              </a:spcAft>
-              <a:buNone/>
-            </a:pPr>
-            <a:r>
-              <a:rPr lang="en-US" sz="1800" b="1" dirty="0">
-                <a:solidFill>
-                  <a:srgbClr val="FE4447"/>
-                </a:solidFill>
-                <a:latin typeface="Georgia" pitchFamily="34" charset="0"/>
-                <a:ea typeface="Georgia" pitchFamily="34" charset="-122"/>
-                <a:cs typeface="Georgia" pitchFamily="34" charset="-120"/>
-              </a:rPr>
-              <a:t>Learning objective</a:t>
-            </a:r>
-            <a:endParaRPr lang="en-US" sz="1800" dirty="0"/>
-          </a:p>
-        </p:txBody>
-      </p:sp>
-      <p:sp>
-        <p:nvSpPr>
-          <p:cNvPr id="6" name="Text 4"/>
-          <p:cNvSpPr/>
-          <p:nvPr/>
-        </p:nvSpPr>
-        <p:spPr>
-          <a:xfrm>
-            <a:off x="406301" y="1637854"/>
-            <a:ext cx="8498026" cy="426541"/>
-          </a:xfrm>
-          <a:prstGeom prst="rect">
-            <a:avLst/>
-          </a:prstGeom>
-          <a:noFill/>
-          <a:ln/>
-        </p:spPr>
-        <p:txBody>
-          <a:bodyPr wrap="square" lIns="0" tIns="0" rIns="0" bIns="0" rtlCol="0" anchor="t"/>
-          <a:lstStyle/>
-          <a:p>
-            <a:pPr algn="l" indent="0" marL="0">
-              <a:lnSpc>
-                <a:spcPts val="1680"/>
-              </a:lnSpc>
-              <a:spcBef>
-                <a:spcPts val="300"/>
-              </a:spcBef>
-              <a:spcAft>
-                <a:spcPts val="300"/>
-              </a:spcAft>
-              <a:buNone/>
-            </a:pPr>
-            <a:r>
-              <a:rPr lang="en-US" sz="1200" dirty="0">
-                <a:solidFill>
-                  <a:srgbClr val="1C2833"/>
-                </a:solidFill>
-                <a:latin typeface="Arial" pitchFamily="34" charset="0"/>
-                <a:ea typeface="Arial" pitchFamily="34" charset="-122"/>
-                <a:cs typeface="Arial" pitchFamily="34" charset="-120"/>
-              </a:rPr>
-              <a:t>By the end of this lesson, every pair will have rehearsed their 5-minute routine end-to-end and received feedback from a buddy pair.</a:t>
-            </a:r>
-            <a:endParaRPr lang="en-US" sz="1200" dirty="0"/>
-          </a:p>
-        </p:txBody>
-      </p:sp>
-      <p:sp>
-        <p:nvSpPr>
-          <p:cNvPr id="7" name="Text 5"/>
-          <p:cNvSpPr/>
-          <p:nvPr/>
-        </p:nvSpPr>
-        <p:spPr>
-          <a:xfrm>
             <a:off x="406301" y="4434929"/>
             <a:ext cx="8498026" cy="213271"/>
           </a:xfrm>
@@ -2251,7 +2333,7 @@
                 <a:ea typeface="Georgia" pitchFamily="34" charset="-122"/>
                 <a:cs typeface="Georgia" pitchFamily="34" charset="-120"/>
               </a:rPr>
-              <a:t>Teacher notes</a:t>
+              <a:t>Homework</a:t>
             </a:r>
             <a:endParaRPr lang="en-US" sz="1800" dirty="0"/>
           </a:p>
@@ -2265,8 +2347,8 @@
         </p:nvSpPr>
         <p:spPr>
           <a:xfrm>
-            <a:off x="406301" y="870942"/>
-            <a:ext cx="8498026" cy="639812"/>
+            <a:off x="634901" y="883593"/>
+            <a:ext cx="8102798" cy="281880"/>
           </a:xfrm>
           <a:prstGeom prst="rect">
             <a:avLst/>
@@ -2278,17 +2360,15 @@
           <a:bodyPr wrap="square" lIns="0" tIns="0" rIns="0" bIns="0" rtlCol="0" anchor="t"/>
           <a:lstStyle/>
           <a:p>
-            <a:pPr algn="l" indent="0" marL="0">
-              <a:lnSpc>
-                <a:spcPts val="1680"/>
-              </a:lnSpc>
-              <a:spcBef>
-                <a:spcPts val="300"/>
-              </a:spcBef>
-              <a:spcAft>
-                <a:spcPts val="300"/>
-              </a:spcAft>
-              <a:buNone/>
+            <a:pPr algn="l" marL="342900" indent="-342900">
+              <a:lnSpc>
+                <a:spcPts val="1620"/>
+              </a:lnSpc>
+              <a:spcAft>
+                <a:spcPts val="300"/>
+              </a:spcAft>
+              <a:buSzPct val="100000"/>
+              <a:buChar char="•"/>
             </a:pPr>
             <a:r>
               <a:rPr lang="en-US" sz="1200" dirty="0">
@@ -2299,53 +2379,7 @@
                 <a:ea typeface="Arial" pitchFamily="34" charset="-122"/>
                 <a:cs typeface="Arial" pitchFamily="34" charset="-120"/>
               </a:rPr>
-              <a:t>– The buddy-pair rehearsal is the most useful feedback step. Encourage feedback as </a:t>
-            </a:r>
-            <a:pPr algn="l" indent="0" marL="0">
-              <a:lnSpc>
-                <a:spcPts val="1680"/>
-              </a:lnSpc>
-              <a:spcBef>
-                <a:spcPts val="300"/>
-              </a:spcBef>
-              <a:spcAft>
-                <a:spcPts val="300"/>
-              </a:spcAft>
-              <a:buNone/>
-            </a:pPr>
-            <a:r>
-              <a:rPr lang="en-US" sz="1200" i="1" dirty="0">
-                <a:solidFill>
-                  <a:srgbClr val="1C2833"/>
-                </a:solidFill>
-                <a:latin typeface="Arial" pitchFamily="34" charset="0"/>
-                <a:ea typeface="Arial" pitchFamily="34" charset="-122"/>
-                <a:cs typeface="Arial" pitchFamily="34" charset="-120"/>
-              </a:rPr>
-              <a:t>kind and specific</a:t>
-            </a:r>
-            <a:pPr algn="l" indent="0" marL="0">
-              <a:lnSpc>
-                <a:spcPts val="1680"/>
-              </a:lnSpc>
-              <a:spcBef>
-                <a:spcPts val="300"/>
-              </a:spcBef>
-              <a:spcAft>
-                <a:spcPts val="300"/>
-              </a:spcAft>
-              <a:buNone/>
-            </a:pPr>
-            <a:r>
-              <a:rPr lang="en-US" sz="1200" dirty="0">
-                <a:solidFill>
-                  <a:srgbClr val="1C2833"/>
-                </a:solidFill>
-                <a:latin typeface="Arial" pitchFamily="34" charset="0"/>
-                <a:ea typeface="Arial" pitchFamily="34" charset="-122"/>
-                <a:cs typeface="Arial" pitchFamily="34" charset="-120"/>
-              </a:rPr>
-              <a:t> — "the transition from down-dog to lunge felt slow" beats "good job." – Pairs who can't complete a clean run-through by end of class need extra support — invite a 15-min lunch-time rehearsal if possible.</a:t>
+              <a:t>Practise the full routine one more time. Bring everything tomorrow.</a:t>
             </a:r>
             <a:endParaRPr lang="en-US" sz="1200" dirty="0"/>
           </a:p>
@@ -2503,7 +2537,7 @@
                 <a:ea typeface="Georgia" pitchFamily="34" charset="-122"/>
                 <a:cs typeface="Georgia" pitchFamily="34" charset="-120"/>
               </a:rPr>
-              <a:t>Citation(s) used in this lesson</a:t>
+              <a:t>Differentiation</a:t>
             </a:r>
             <a:endParaRPr lang="en-US" sz="1800" dirty="0"/>
           </a:p>
@@ -2517,8 +2551,8 @@
         </p:nvSpPr>
         <p:spPr>
           <a:xfrm>
-            <a:off x="406301" y="870942"/>
-            <a:ext cx="8498026" cy="213271"/>
+            <a:off x="634901" y="883593"/>
+            <a:ext cx="8102798" cy="525661"/>
           </a:xfrm>
           <a:prstGeom prst="rect">
             <a:avLst/>
@@ -2530,20 +2564,18 @@
           <a:bodyPr wrap="square" lIns="0" tIns="0" rIns="0" bIns="0" rtlCol="0" anchor="t"/>
           <a:lstStyle/>
           <a:p>
-            <a:pPr algn="l" indent="0" marL="0">
-              <a:lnSpc>
-                <a:spcPts val="1680"/>
-              </a:lnSpc>
-              <a:spcBef>
-                <a:spcPts val="300"/>
-              </a:spcBef>
-              <a:spcAft>
-                <a:spcPts val="300"/>
-              </a:spcAft>
-              <a:buNone/>
-            </a:pPr>
-            <a:r>
-              <a:rPr lang="en-US" sz="1200" dirty="0">
+            <a:pPr algn="l" marL="342900" indent="-342900">
+              <a:lnSpc>
+                <a:spcPts val="1620"/>
+              </a:lnSpc>
+              <a:spcAft>
+                <a:spcPts val="300"/>
+              </a:spcAft>
+              <a:buSzPct val="100000"/>
+              <a:buChar char="•"/>
+            </a:pPr>
+            <a:r>
+              <a:rPr lang="en-US" sz="1200" b="1" dirty="0">
                 <a:solidFill>
                   <a:srgbClr val="1C2833"/>
                 </a:solidFill>
@@ -2551,7 +2583,543 @@
                 <a:ea typeface="Arial" pitchFamily="34" charset="-122"/>
                 <a:cs typeface="Arial" pitchFamily="34" charset="-120"/>
               </a:rPr>
-              <a:t>– Pair source verified.</a:t>
+              <a:t>Tier up:</a:t>
+            </a:r>
+            <a:pPr algn="l" indent="0" marL="0">
+              <a:lnSpc>
+                <a:spcPts val="1620"/>
+              </a:lnSpc>
+              <a:spcAft>
+                <a:spcPts val="300"/>
+              </a:spcAft>
+              <a:buNone/>
+            </a:pPr>
+            <a:r>
+              <a:rPr lang="en-US" sz="1200" dirty="0">
+                <a:solidFill>
+                  <a:srgbClr val="1C2833"/>
+                </a:solidFill>
+                <a:latin typeface="Arial" pitchFamily="34" charset="0"/>
+                <a:ea typeface="Arial" pitchFamily="34" charset="-122"/>
+                <a:cs typeface="Arial" pitchFamily="34" charset="-120"/>
+              </a:rPr>
+              <a:t> Add a memorable 1-line "takeaway" the audience will remember after the 5 min.</a:t>
+            </a:r>
+            <a:endParaRPr lang="en-US" sz="1200" dirty="0"/>
+          </a:p>
+          <a:p>
+            <a:pPr algn="l" marL="342900" indent="-342900">
+              <a:lnSpc>
+                <a:spcPts val="1620"/>
+              </a:lnSpc>
+              <a:spcAft>
+                <a:spcPts val="300"/>
+              </a:spcAft>
+              <a:buSzPct val="100000"/>
+              <a:buChar char="•"/>
+            </a:pPr>
+            <a:r>
+              <a:rPr lang="en-US" sz="1200" b="1" dirty="0">
+                <a:solidFill>
+                  <a:srgbClr val="1C2833"/>
+                </a:solidFill>
+                <a:latin typeface="Arial" pitchFamily="34" charset="0"/>
+                <a:ea typeface="Arial" pitchFamily="34" charset="-122"/>
+                <a:cs typeface="Arial" pitchFamily="34" charset="-120"/>
+              </a:rPr>
+              <a:t>Tier down:</a:t>
+            </a:r>
+            <a:pPr algn="l" indent="0" marL="0">
+              <a:lnSpc>
+                <a:spcPts val="1620"/>
+              </a:lnSpc>
+              <a:spcAft>
+                <a:spcPts val="300"/>
+              </a:spcAft>
+              <a:buNone/>
+            </a:pPr>
+            <a:r>
+              <a:rPr lang="en-US" sz="1200" dirty="0">
+                <a:solidFill>
+                  <a:srgbClr val="1C2833"/>
+                </a:solidFill>
+                <a:latin typeface="Arial" pitchFamily="34" charset="0"/>
+                <a:ea typeface="Arial" pitchFamily="34" charset="-122"/>
+                <a:cs typeface="Arial" pitchFamily="34" charset="-120"/>
+              </a:rPr>
+              <a:t> Reduce to 3 poses + 1 breath segment if 4–5 poses isn't sticking.</a:t>
+            </a:r>
+            <a:endParaRPr lang="en-US" sz="1200" dirty="0"/>
+          </a:p>
+        </p:txBody>
+      </p:sp>
+      <p:sp>
+        <p:nvSpPr>
+          <p:cNvPr id="5" name="Text 3"/>
+          <p:cNvSpPr/>
+          <p:nvPr/>
+        </p:nvSpPr>
+        <p:spPr>
+          <a:xfrm>
+            <a:off x="406301" y="4434929"/>
+            <a:ext cx="8498026" cy="213271"/>
+          </a:xfrm>
+          <a:prstGeom prst="rect">
+            <a:avLst/>
+          </a:prstGeom>
+          <a:noFill/>
+          <a:ln/>
+        </p:spPr>
+        <p:txBody>
+          <a:bodyPr wrap="square" lIns="0" tIns="0" rIns="0" bIns="0" rtlCol="0" anchor="t"/>
+          <a:lstStyle/>
+          <a:p>
+            <a:pPr algn="l" indent="0" marL="0">
+              <a:lnSpc>
+                <a:spcPts val="1680"/>
+              </a:lnSpc>
+              <a:spcBef>
+                <a:spcPts val="300"/>
+              </a:spcBef>
+              <a:spcAft>
+                <a:spcPts val="300"/>
+              </a:spcAft>
+              <a:buNone/>
+            </a:pPr>
+            <a:r>
+              <a:rPr lang="en-US" sz="1200" dirty="0">
+                <a:solidFill>
+                  <a:srgbClr val="1C2833"/>
+                </a:solidFill>
+                <a:latin typeface="Arial" pitchFamily="34" charset="0"/>
+                <a:ea typeface="Arial" pitchFamily="34" charset="-122"/>
+                <a:cs typeface="Arial" pitchFamily="34" charset="-120"/>
+              </a:rPr>
+              <a:t>Middle ·  · IKS Curriculum</a:t>
+            </a:r>
+            <a:endParaRPr lang="en-US" sz="1200" dirty="0"/>
+          </a:p>
+        </p:txBody>
+      </p:sp>
+    </p:spTree>
+  </p:cSld>
+  <p:clrMapOvr>
+    <a:masterClrMapping/>
+  </p:clrMapOvr>
+</p:sld>
+</file>
+
+<file path=ppt/slides/slide12.xml><?xml version="1.0" encoding="utf-8"?>
+<p:sld xmlns:a="http://schemas.openxmlformats.org/drawingml/2006/main" xmlns:r="http://schemas.openxmlformats.org/officeDocument/2006/relationships" xmlns:p="http://schemas.openxmlformats.org/presentationml/2006/main">
+  <p:cSld name="Slide 12">
+    <p:bg>
+      <p:bgPr>
+        <a:solidFill>
+          <a:srgbClr val="FFFFFF"/>
+        </a:solidFill>
+      </p:bgPr>
+    </p:bg>
+    <p:spTree>
+      <p:nvGrpSpPr>
+        <p:cNvPr id="1" name=""/>
+        <p:cNvGrpSpPr/>
+        <p:nvPr/>
+      </p:nvGrpSpPr>
+      <p:grpSpPr>
+        <a:xfrm>
+          <a:off x="0" y="0"/>
+          <a:ext cx="0" cy="0"/>
+          <a:chOff x="0" y="0"/>
+          <a:chExt cx="0" cy="0"/>
+        </a:xfrm>
+      </p:grpSpPr>
+      <p:sp>
+        <p:nvSpPr>
+          <p:cNvPr id="2" name="Text 0"/>
+          <p:cNvSpPr/>
+          <p:nvPr/>
+        </p:nvSpPr>
+        <p:spPr>
+          <a:xfrm>
+            <a:off x="0" y="0"/>
+            <a:ext cx="9144000" cy="101501"/>
+          </a:xfrm>
+          <a:prstGeom prst="rect">
+            <a:avLst/>
+          </a:prstGeom>
+          <a:solidFill>
+            <a:srgbClr val="277884"/>
+          </a:solidFill>
+          <a:ln/>
+        </p:spPr>
+        <p:txBody>
+          <a:bodyPr wrap="square" rtlCol="0" anchor="ctr"/>
+          <a:lstStyle/>
+          <a:p>
+            <a:pPr indent="0" marL="0">
+              <a:buNone/>
+            </a:pPr>
+            <a:endParaRPr lang="en-US" dirty="0"/>
+          </a:p>
+        </p:txBody>
+      </p:sp>
+      <p:sp>
+        <p:nvSpPr>
+          <p:cNvPr id="3" name="Text 1"/>
+          <p:cNvSpPr/>
+          <p:nvPr/>
+        </p:nvSpPr>
+        <p:spPr>
+          <a:xfrm>
+            <a:off x="406301" y="457051"/>
+            <a:ext cx="8498026" cy="274290"/>
+          </a:xfrm>
+          <a:prstGeom prst="rect">
+            <a:avLst/>
+          </a:prstGeom>
+          <a:noFill/>
+          <a:ln/>
+        </p:spPr>
+        <p:txBody>
+          <a:bodyPr wrap="square" lIns="0" tIns="0" rIns="0" bIns="0" rtlCol="0" anchor="t"/>
+          <a:lstStyle/>
+          <a:p>
+            <a:pPr algn="l" indent="0" marL="0">
+              <a:lnSpc>
+                <a:spcPts val="2160"/>
+              </a:lnSpc>
+              <a:spcBef>
+                <a:spcPts val="600"/>
+              </a:spcBef>
+              <a:spcAft>
+                <a:spcPts val="800"/>
+              </a:spcAft>
+              <a:buNone/>
+            </a:pPr>
+            <a:r>
+              <a:rPr lang="en-US" sz="1800" b="1" dirty="0">
+                <a:solidFill>
+                  <a:srgbClr val="FE4447"/>
+                </a:solidFill>
+                <a:latin typeface="Georgia" pitchFamily="34" charset="0"/>
+                <a:ea typeface="Georgia" pitchFamily="34" charset="-122"/>
+                <a:cs typeface="Georgia" pitchFamily="34" charset="-120"/>
+              </a:rPr>
+              <a:t>Teacher notes</a:t>
+            </a:r>
+            <a:endParaRPr lang="en-US" sz="1800" dirty="0"/>
+          </a:p>
+        </p:txBody>
+      </p:sp>
+      <p:sp>
+        <p:nvSpPr>
+          <p:cNvPr id="4" name="Text 2"/>
+          <p:cNvSpPr/>
+          <p:nvPr/>
+        </p:nvSpPr>
+        <p:spPr>
+          <a:xfrm>
+            <a:off x="634901" y="883593"/>
+            <a:ext cx="8102798" cy="937022"/>
+          </a:xfrm>
+          <a:prstGeom prst="rect">
+            <a:avLst/>
+          </a:prstGeom>
+          <a:noFill/>
+          <a:ln/>
+        </p:spPr>
+        <p:txBody>
+          <a:bodyPr wrap="square" lIns="0" tIns="0" rIns="0" bIns="0" rtlCol="0" anchor="t"/>
+          <a:lstStyle/>
+          <a:p>
+            <a:pPr algn="l" marL="342900" indent="-342900">
+              <a:lnSpc>
+                <a:spcPts val="1620"/>
+              </a:lnSpc>
+              <a:spcAft>
+                <a:spcPts val="300"/>
+              </a:spcAft>
+              <a:buSzPct val="100000"/>
+              <a:buChar char="•"/>
+            </a:pPr>
+            <a:r>
+              <a:rPr lang="en-US" sz="1200" dirty="0">
+                <a:solidFill>
+                  <a:srgbClr val="1C2833"/>
+                </a:solidFill>
+                <a:latin typeface="Arial" pitchFamily="34" charset="0"/>
+                <a:ea typeface="Arial" pitchFamily="34" charset="-122"/>
+                <a:cs typeface="Arial" pitchFamily="34" charset="-120"/>
+              </a:rPr>
+              <a:t>The buddy-pair rehearsal is the most useful feedback step. Encourage feedback as </a:t>
+            </a:r>
+            <a:pPr algn="l" indent="0" marL="0">
+              <a:lnSpc>
+                <a:spcPts val="1620"/>
+              </a:lnSpc>
+              <a:spcAft>
+                <a:spcPts val="300"/>
+              </a:spcAft>
+              <a:buNone/>
+            </a:pPr>
+            <a:r>
+              <a:rPr lang="en-US" sz="1200" i="1" dirty="0">
+                <a:solidFill>
+                  <a:srgbClr val="1C2833"/>
+                </a:solidFill>
+                <a:latin typeface="Arial" pitchFamily="34" charset="0"/>
+                <a:ea typeface="Arial" pitchFamily="34" charset="-122"/>
+                <a:cs typeface="Arial" pitchFamily="34" charset="-120"/>
+              </a:rPr>
+              <a:t>kind and specific</a:t>
+            </a:r>
+            <a:pPr algn="l" indent="0" marL="0">
+              <a:lnSpc>
+                <a:spcPts val="1620"/>
+              </a:lnSpc>
+              <a:spcAft>
+                <a:spcPts val="300"/>
+              </a:spcAft>
+              <a:buNone/>
+            </a:pPr>
+            <a:r>
+              <a:rPr lang="en-US" sz="1200" dirty="0">
+                <a:solidFill>
+                  <a:srgbClr val="1C2833"/>
+                </a:solidFill>
+                <a:latin typeface="Arial" pitchFamily="34" charset="0"/>
+                <a:ea typeface="Arial" pitchFamily="34" charset="-122"/>
+                <a:cs typeface="Arial" pitchFamily="34" charset="-120"/>
+              </a:rPr>
+              <a:t> — "the transition from down-dog to lunge felt slow" beats "good job."</a:t>
+            </a:r>
+            <a:endParaRPr lang="en-US" sz="1200" dirty="0"/>
+          </a:p>
+          <a:p>
+            <a:pPr algn="l" marL="342900" indent="-342900">
+              <a:lnSpc>
+                <a:spcPts val="1620"/>
+              </a:lnSpc>
+              <a:spcAft>
+                <a:spcPts val="300"/>
+              </a:spcAft>
+              <a:buSzPct val="100000"/>
+              <a:buChar char="•"/>
+            </a:pPr>
+            <a:r>
+              <a:rPr lang="en-US" sz="1200" dirty="0">
+                <a:solidFill>
+                  <a:srgbClr val="1C2833"/>
+                </a:solidFill>
+                <a:latin typeface="Arial" pitchFamily="34" charset="0"/>
+                <a:ea typeface="Arial" pitchFamily="34" charset="-122"/>
+                <a:cs typeface="Arial" pitchFamily="34" charset="-120"/>
+              </a:rPr>
+              <a:t>Pairs who can't complete a clean run-through by end of class need extra support — invite a 15-min lunch-time rehearsal if possible.</a:t>
+            </a:r>
+            <a:endParaRPr lang="en-US" sz="1200" dirty="0"/>
+          </a:p>
+        </p:txBody>
+      </p:sp>
+      <p:sp>
+        <p:nvSpPr>
+          <p:cNvPr id="5" name="Text 3"/>
+          <p:cNvSpPr/>
+          <p:nvPr/>
+        </p:nvSpPr>
+        <p:spPr>
+          <a:xfrm>
+            <a:off x="406301" y="4434929"/>
+            <a:ext cx="8498026" cy="213271"/>
+          </a:xfrm>
+          <a:prstGeom prst="rect">
+            <a:avLst/>
+          </a:prstGeom>
+          <a:noFill/>
+          <a:ln/>
+        </p:spPr>
+        <p:txBody>
+          <a:bodyPr wrap="square" lIns="0" tIns="0" rIns="0" bIns="0" rtlCol="0" anchor="t"/>
+          <a:lstStyle/>
+          <a:p>
+            <a:pPr algn="l" indent="0" marL="0">
+              <a:lnSpc>
+                <a:spcPts val="1680"/>
+              </a:lnSpc>
+              <a:spcBef>
+                <a:spcPts val="300"/>
+              </a:spcBef>
+              <a:spcAft>
+                <a:spcPts val="300"/>
+              </a:spcAft>
+              <a:buNone/>
+            </a:pPr>
+            <a:r>
+              <a:rPr lang="en-US" sz="1200" dirty="0">
+                <a:solidFill>
+                  <a:srgbClr val="1C2833"/>
+                </a:solidFill>
+                <a:latin typeface="Arial" pitchFamily="34" charset="0"/>
+                <a:ea typeface="Arial" pitchFamily="34" charset="-122"/>
+                <a:cs typeface="Arial" pitchFamily="34" charset="-120"/>
+              </a:rPr>
+              <a:t>Middle ·  · IKS Curriculum</a:t>
+            </a:r>
+            <a:endParaRPr lang="en-US" sz="1200" dirty="0"/>
+          </a:p>
+        </p:txBody>
+      </p:sp>
+    </p:spTree>
+  </p:cSld>
+  <p:clrMapOvr>
+    <a:masterClrMapping/>
+  </p:clrMapOvr>
+</p:sld>
+</file>
+
+<file path=ppt/slides/slide13.xml><?xml version="1.0" encoding="utf-8"?>
+<p:sld xmlns:a="http://schemas.openxmlformats.org/drawingml/2006/main" xmlns:r="http://schemas.openxmlformats.org/officeDocument/2006/relationships" xmlns:p="http://schemas.openxmlformats.org/presentationml/2006/main">
+  <p:cSld name="Slide 13">
+    <p:bg>
+      <p:bgPr>
+        <a:solidFill>
+          <a:srgbClr val="FFFFFF"/>
+        </a:solidFill>
+      </p:bgPr>
+    </p:bg>
+    <p:spTree>
+      <p:nvGrpSpPr>
+        <p:cNvPr id="1" name=""/>
+        <p:cNvGrpSpPr/>
+        <p:nvPr/>
+      </p:nvGrpSpPr>
+      <p:grpSpPr>
+        <a:xfrm>
+          <a:off x="0" y="0"/>
+          <a:ext cx="0" cy="0"/>
+          <a:chOff x="0" y="0"/>
+          <a:chExt cx="0" cy="0"/>
+        </a:xfrm>
+      </p:grpSpPr>
+      <p:sp>
+        <p:nvSpPr>
+          <p:cNvPr id="2" name="Text 0"/>
+          <p:cNvSpPr/>
+          <p:nvPr/>
+        </p:nvSpPr>
+        <p:spPr>
+          <a:xfrm>
+            <a:off x="0" y="0"/>
+            <a:ext cx="9144000" cy="101501"/>
+          </a:xfrm>
+          <a:prstGeom prst="rect">
+            <a:avLst/>
+          </a:prstGeom>
+          <a:solidFill>
+            <a:srgbClr val="277884"/>
+          </a:solidFill>
+          <a:ln/>
+        </p:spPr>
+        <p:txBody>
+          <a:bodyPr wrap="square" rtlCol="0" anchor="ctr"/>
+          <a:lstStyle/>
+          <a:p>
+            <a:pPr indent="0" marL="0">
+              <a:buNone/>
+            </a:pPr>
+            <a:endParaRPr lang="en-US" dirty="0"/>
+          </a:p>
+        </p:txBody>
+      </p:sp>
+      <p:sp>
+        <p:nvSpPr>
+          <p:cNvPr id="3" name="Text 1"/>
+          <p:cNvSpPr/>
+          <p:nvPr/>
+        </p:nvSpPr>
+        <p:spPr>
+          <a:xfrm>
+            <a:off x="406301" y="457051"/>
+            <a:ext cx="8498026" cy="274290"/>
+          </a:xfrm>
+          <a:prstGeom prst="rect">
+            <a:avLst/>
+          </a:prstGeom>
+          <a:noFill/>
+          <a:ln/>
+        </p:spPr>
+        <p:txBody>
+          <a:bodyPr wrap="square" lIns="0" tIns="0" rIns="0" bIns="0" rtlCol="0" anchor="t"/>
+          <a:lstStyle/>
+          <a:p>
+            <a:pPr algn="l" indent="0" marL="0">
+              <a:lnSpc>
+                <a:spcPts val="2160"/>
+              </a:lnSpc>
+              <a:spcBef>
+                <a:spcPts val="600"/>
+              </a:spcBef>
+              <a:spcAft>
+                <a:spcPts val="800"/>
+              </a:spcAft>
+              <a:buNone/>
+            </a:pPr>
+            <a:r>
+              <a:rPr lang="en-US" sz="1800" b="1" dirty="0">
+                <a:solidFill>
+                  <a:srgbClr val="FE4447"/>
+                </a:solidFill>
+                <a:latin typeface="Georgia" pitchFamily="34" charset="0"/>
+                <a:ea typeface="Georgia" pitchFamily="34" charset="-122"/>
+                <a:cs typeface="Georgia" pitchFamily="34" charset="-120"/>
+              </a:rPr>
+              <a:t>Citation(s) used in this lesson</a:t>
+            </a:r>
+            <a:endParaRPr lang="en-US" sz="1800" dirty="0"/>
+          </a:p>
+        </p:txBody>
+      </p:sp>
+      <p:sp>
+        <p:nvSpPr>
+          <p:cNvPr id="4" name="Text 2"/>
+          <p:cNvSpPr/>
+          <p:nvPr/>
+        </p:nvSpPr>
+        <p:spPr>
+          <a:xfrm>
+            <a:off x="634901" y="883593"/>
+            <a:ext cx="8102798" cy="281880"/>
+          </a:xfrm>
+          <a:prstGeom prst="rect">
+            <a:avLst/>
+          </a:prstGeom>
+          <a:noFill/>
+          <a:ln/>
+        </p:spPr>
+        <p:txBody>
+          <a:bodyPr wrap="square" lIns="0" tIns="0" rIns="0" bIns="0" rtlCol="0" anchor="t"/>
+          <a:lstStyle/>
+          <a:p>
+            <a:pPr algn="l" marL="342900" indent="-342900">
+              <a:lnSpc>
+                <a:spcPts val="1620"/>
+              </a:lnSpc>
+              <a:spcAft>
+                <a:spcPts val="300"/>
+              </a:spcAft>
+              <a:buSzPct val="100000"/>
+              <a:buChar char="•"/>
+            </a:pPr>
+            <a:r>
+              <a:rPr lang="en-US" sz="1200" dirty="0">
+                <a:solidFill>
+                  <a:srgbClr val="1C2833"/>
+                </a:solidFill>
+                <a:latin typeface="Arial" pitchFamily="34" charset="0"/>
+                <a:ea typeface="Arial" pitchFamily="34" charset="-122"/>
+                <a:cs typeface="Arial" pitchFamily="34" charset="-120"/>
+              </a:rPr>
+              <a:t>Pair source verified.</a:t>
             </a:r>
             <a:endParaRPr lang="en-US" sz="1200" dirty="0"/>
           </a:p>
@@ -2709,7 +3277,7 @@
                 <a:ea typeface="Georgia" pitchFamily="34" charset="-122"/>
                 <a:cs typeface="Georgia" pitchFamily="34" charset="-120"/>
               </a:rPr>
-              <a:t>Materials</a:t>
+              <a:t>Learning objective</a:t>
             </a:r>
             <a:endParaRPr lang="en-US" sz="1800" dirty="0"/>
           </a:p>
@@ -2724,7 +3292,7 @@
         <p:spPr>
           <a:xfrm>
             <a:off x="406301" y="870942"/>
-            <a:ext cx="8498026" cy="213271"/>
+            <a:ext cx="8498026" cy="426541"/>
           </a:xfrm>
           <a:prstGeom prst="rect">
             <a:avLst/>
@@ -2757,7 +3325,7 @@
                 <a:ea typeface="Arial" pitchFamily="34" charset="-122"/>
                 <a:cs typeface="Arial" pitchFamily="34" charset="-120"/>
               </a:rPr>
-              <a:t>– All in-progress materials. – Mats laid out. – Stopwatch. – Feedback slip per pair.</a:t>
+              <a:t>By the end of this lesson, every pair will have rehearsed their 5-minute routine end-to-end and received feedback from a buddy pair.</a:t>
             </a:r>
             <a:endParaRPr lang="en-US" sz="1200" dirty="0"/>
           </a:p>
@@ -2915,7 +3483,7 @@
                 <a:ea typeface="Georgia" pitchFamily="34" charset="-122"/>
                 <a:cs typeface="Georgia" pitchFamily="34" charset="-120"/>
               </a:rPr>
-              <a:t>Lesson flow</a:t>
+              <a:t>Materials</a:t>
             </a:r>
             <a:endParaRPr lang="en-US" sz="1800" dirty="0"/>
           </a:p>
@@ -2924,6 +3492,124 @@
       <p:sp>
         <p:nvSpPr>
           <p:cNvPr id="4" name="Text 2"/>
+          <p:cNvSpPr/>
+          <p:nvPr/>
+        </p:nvSpPr>
+        <p:spPr>
+          <a:xfrm>
+            <a:off x="634901" y="883593"/>
+            <a:ext cx="8102798" cy="1013222"/>
+          </a:xfrm>
+          <a:prstGeom prst="rect">
+            <a:avLst/>
+          </a:prstGeom>
+          <a:noFill/>
+          <a:ln/>
+        </p:spPr>
+        <p:txBody>
+          <a:bodyPr wrap="square" lIns="0" tIns="0" rIns="0" bIns="0" rtlCol="0" anchor="t"/>
+          <a:lstStyle/>
+          <a:p>
+            <a:pPr algn="l" marL="342900" indent="-342900">
+              <a:lnSpc>
+                <a:spcPts val="1620"/>
+              </a:lnSpc>
+              <a:spcAft>
+                <a:spcPts val="300"/>
+              </a:spcAft>
+              <a:buSzPct val="100000"/>
+              <a:buChar char="•"/>
+            </a:pPr>
+            <a:r>
+              <a:rPr lang="en-US" sz="1200" dirty="0">
+                <a:solidFill>
+                  <a:srgbClr val="1C2833"/>
+                </a:solidFill>
+                <a:latin typeface="Arial" pitchFamily="34" charset="0"/>
+                <a:ea typeface="Arial" pitchFamily="34" charset="-122"/>
+                <a:cs typeface="Arial" pitchFamily="34" charset="-120"/>
+              </a:rPr>
+              <a:t>All in-progress materials.</a:t>
+            </a:r>
+            <a:endParaRPr lang="en-US" sz="1200" dirty="0"/>
+          </a:p>
+          <a:p>
+            <a:pPr algn="l" marL="342900" indent="-342900">
+              <a:lnSpc>
+                <a:spcPts val="1620"/>
+              </a:lnSpc>
+              <a:spcAft>
+                <a:spcPts val="300"/>
+              </a:spcAft>
+              <a:buSzPct val="100000"/>
+              <a:buChar char="•"/>
+            </a:pPr>
+            <a:r>
+              <a:rPr lang="en-US" sz="1200" dirty="0">
+                <a:solidFill>
+                  <a:srgbClr val="1C2833"/>
+                </a:solidFill>
+                <a:latin typeface="Arial" pitchFamily="34" charset="0"/>
+                <a:ea typeface="Arial" pitchFamily="34" charset="-122"/>
+                <a:cs typeface="Arial" pitchFamily="34" charset="-120"/>
+              </a:rPr>
+              <a:t>Mats laid out.</a:t>
+            </a:r>
+            <a:endParaRPr lang="en-US" sz="1200" dirty="0"/>
+          </a:p>
+          <a:p>
+            <a:pPr algn="l" marL="342900" indent="-342900">
+              <a:lnSpc>
+                <a:spcPts val="1620"/>
+              </a:lnSpc>
+              <a:spcAft>
+                <a:spcPts val="300"/>
+              </a:spcAft>
+              <a:buSzPct val="100000"/>
+              <a:buChar char="•"/>
+            </a:pPr>
+            <a:r>
+              <a:rPr lang="en-US" sz="1200" dirty="0">
+                <a:solidFill>
+                  <a:srgbClr val="1C2833"/>
+                </a:solidFill>
+                <a:latin typeface="Arial" pitchFamily="34" charset="0"/>
+                <a:ea typeface="Arial" pitchFamily="34" charset="-122"/>
+                <a:cs typeface="Arial" pitchFamily="34" charset="-120"/>
+              </a:rPr>
+              <a:t>Stopwatch.</a:t>
+            </a:r>
+            <a:endParaRPr lang="en-US" sz="1200" dirty="0"/>
+          </a:p>
+          <a:p>
+            <a:pPr algn="l" marL="342900" indent="-342900">
+              <a:lnSpc>
+                <a:spcPts val="1620"/>
+              </a:lnSpc>
+              <a:spcAft>
+                <a:spcPts val="300"/>
+              </a:spcAft>
+              <a:buSzPct val="100000"/>
+              <a:buChar char="•"/>
+            </a:pPr>
+            <a:r>
+              <a:rPr lang="en-US" sz="1200" dirty="0">
+                <a:solidFill>
+                  <a:srgbClr val="1C2833"/>
+                </a:solidFill>
+                <a:latin typeface="Arial" pitchFamily="34" charset="0"/>
+                <a:ea typeface="Arial" pitchFamily="34" charset="-122"/>
+                <a:cs typeface="Arial" pitchFamily="34" charset="-120"/>
+              </a:rPr>
+              <a:t>Feedback slip per pair.</a:t>
+            </a:r>
+            <a:endParaRPr lang="en-US" sz="1200" dirty="0"/>
+          </a:p>
+        </p:txBody>
+      </p:sp>
+      <p:sp>
+        <p:nvSpPr>
+          <p:cNvPr id="5" name="Text 3"/>
           <p:cNvSpPr/>
           <p:nvPr/>
         </p:nvSpPr>
@@ -3073,7 +3759,7 @@
                 <a:ea typeface="Georgia" pitchFamily="34" charset="-122"/>
                 <a:cs typeface="Georgia" pitchFamily="34" charset="-120"/>
               </a:rPr>
-              <a:t>Settle (2 min)</a:t>
+              <a:t>Lesson flow</a:t>
             </a:r>
             <a:endParaRPr lang="en-US" sz="1800" dirty="0"/>
           </a:p>
@@ -3082,54 +3768,6 @@
       <p:sp>
         <p:nvSpPr>
           <p:cNvPr id="4" name="Text 2"/>
-          <p:cNvSpPr/>
-          <p:nvPr/>
-        </p:nvSpPr>
-        <p:spPr>
-          <a:xfrm>
-            <a:off x="406301" y="870942"/>
-            <a:ext cx="8498026" cy="213271"/>
-          </a:xfrm>
-          <a:prstGeom prst="rect">
-            <a:avLst/>
-          </a:prstGeom>
-          <a:noFill/>
-          <a:ln/>
-        </p:spPr>
-        <p:txBody>
-          <a:bodyPr wrap="square" lIns="0" tIns="0" rIns="0" bIns="0" rtlCol="0" anchor="t"/>
-          <a:lstStyle/>
-          <a:p>
-            <a:pPr algn="l" indent="0" marL="0">
-              <a:lnSpc>
-                <a:spcPts val="1680"/>
-              </a:lnSpc>
-              <a:spcBef>
-                <a:spcPts val="300"/>
-              </a:spcBef>
-              <a:spcAft>
-                <a:spcPts val="300"/>
-              </a:spcAft>
-              <a:buNone/>
-            </a:pPr>
-            <a:r>
-              <a:rPr lang="en-US" sz="1200" dirty="0">
-                <a:solidFill>
-                  <a:srgbClr val="1C2833"/>
-                </a:solidFill>
-                <a:latin typeface="Arial" pitchFamily="34" charset="0"/>
-                <a:ea typeface="Arial" pitchFamily="34" charset="-122"/>
-                <a:cs typeface="Arial" pitchFamily="34" charset="-120"/>
-              </a:rPr>
-              <a:t>– Sukhāsana. 5 breaths.</a:t>
-            </a:r>
-            <a:endParaRPr lang="en-US" sz="1200" dirty="0"/>
-          </a:p>
-        </p:txBody>
-      </p:sp>
-      <p:sp>
-        <p:nvSpPr>
-          <p:cNvPr id="5" name="Text 3"/>
           <p:cNvSpPr/>
           <p:nvPr/>
         </p:nvSpPr>
@@ -3279,7 +3917,7 @@
                 <a:ea typeface="Georgia" pitchFamily="34" charset="-122"/>
                 <a:cs typeface="Georgia" pitchFamily="34" charset="-120"/>
               </a:rPr>
-              <a:t>Core (30 min) — Two halves</a:t>
+              <a:t>Settle (2 min)</a:t>
             </a:r>
             <a:endParaRPr lang="en-US" sz="1800" dirty="0"/>
           </a:p>
@@ -3293,8 +3931,8 @@
         </p:nvSpPr>
         <p:spPr>
           <a:xfrm>
-            <a:off x="406301" y="870942"/>
-            <a:ext cx="8498026" cy="853083"/>
+            <a:off x="634901" y="883593"/>
+            <a:ext cx="8102798" cy="281880"/>
           </a:xfrm>
           <a:prstGeom prst="rect">
             <a:avLst/>
@@ -3306,20 +3944,18 @@
           <a:bodyPr wrap="square" lIns="0" tIns="0" rIns="0" bIns="0" rtlCol="0" anchor="t"/>
           <a:lstStyle/>
           <a:p>
-            <a:pPr algn="l" indent="0" marL="0">
-              <a:lnSpc>
-                <a:spcPts val="1680"/>
-              </a:lnSpc>
-              <a:spcBef>
-                <a:spcPts val="300"/>
-              </a:spcBef>
-              <a:spcAft>
-                <a:spcPts val="300"/>
-              </a:spcAft>
-              <a:buNone/>
-            </a:pPr>
-            <a:r>
-              <a:rPr lang="en-US" sz="1200" b="1" dirty="0">
+            <a:pPr algn="l" marL="342900" indent="-342900">
+              <a:lnSpc>
+                <a:spcPts val="1620"/>
+              </a:lnSpc>
+              <a:spcAft>
+                <a:spcPts val="300"/>
+              </a:spcAft>
+              <a:buSzPct val="100000"/>
+              <a:buChar char="•"/>
+            </a:pPr>
+            <a:r>
+              <a:rPr lang="en-US" sz="1200" dirty="0">
                 <a:solidFill>
                   <a:srgbClr val="1C2833"/>
                 </a:solidFill>
@@ -3327,30 +3963,7 @@
                 <a:ea typeface="Arial" pitchFamily="34" charset="-122"/>
                 <a:cs typeface="Arial" pitchFamily="34" charset="-120"/>
               </a:rPr>
-              <a:t>Half 1 (15 min) — Refine.</a:t>
-            </a:r>
-            <a:pPr algn="l" indent="0" marL="0">
-              <a:lnSpc>
-                <a:spcPts val="1680"/>
-              </a:lnSpc>
-              <a:spcBef>
-                <a:spcPts val="300"/>
-              </a:spcBef>
-              <a:spcAft>
-                <a:spcPts val="300"/>
-              </a:spcAft>
-              <a:buNone/>
-            </a:pPr>
-            <a:r>
-              <a:rPr lang="en-US" sz="1200" dirty="0">
-                <a:solidFill>
-                  <a:srgbClr val="1C2833"/>
-                </a:solidFill>
-                <a:latin typeface="Arial" pitchFamily="34" charset="0"/>
-                <a:ea typeface="Arial" pitchFamily="34" charset="-122"/>
-                <a:cs typeface="Arial" pitchFamily="34" charset="-120"/>
-              </a:rPr>
-              <a:t> – Each pair runs their routine once on their own mats, timed. – Teacher rotates: 60 sec per pair, focused question: "Where does the energy of your routine drop?" – Common adjustments to flag: – Pace too fast — students rush through poses. – Breath cues missing. – Transitions clunky. – Source citation forgotten — must be spoken aloud.</a:t>
+              <a:t>Sukhāsana. 5 breaths.</a:t>
             </a:r>
             <a:endParaRPr lang="en-US" sz="1200" dirty="0"/>
           </a:p>
@@ -3359,77 +3972,6 @@
       <p:sp>
         <p:nvSpPr>
           <p:cNvPr id="5" name="Text 3"/>
-          <p:cNvSpPr/>
-          <p:nvPr/>
-        </p:nvSpPr>
-        <p:spPr>
-          <a:xfrm>
-            <a:off x="406301" y="1800225"/>
-            <a:ext cx="8498026" cy="426541"/>
-          </a:xfrm>
-          <a:prstGeom prst="rect">
-            <a:avLst/>
-          </a:prstGeom>
-          <a:noFill/>
-          <a:ln/>
-        </p:spPr>
-        <p:txBody>
-          <a:bodyPr wrap="square" lIns="0" tIns="0" rIns="0" bIns="0" rtlCol="0" anchor="t"/>
-          <a:lstStyle/>
-          <a:p>
-            <a:pPr algn="l" indent="0" marL="0">
-              <a:lnSpc>
-                <a:spcPts val="1680"/>
-              </a:lnSpc>
-              <a:spcBef>
-                <a:spcPts val="300"/>
-              </a:spcBef>
-              <a:spcAft>
-                <a:spcPts val="300"/>
-              </a:spcAft>
-              <a:buNone/>
-            </a:pPr>
-            <a:r>
-              <a:rPr lang="en-US" sz="1200" b="1" dirty="0">
-                <a:solidFill>
-                  <a:srgbClr val="1C2833"/>
-                </a:solidFill>
-                <a:latin typeface="Arial" pitchFamily="34" charset="0"/>
-                <a:ea typeface="Arial" pitchFamily="34" charset="-122"/>
-                <a:cs typeface="Arial" pitchFamily="34" charset="-120"/>
-              </a:rPr>
-              <a:t>Half 2 (15 min) — Buddy rehearsal.</a:t>
-            </a:r>
-            <a:pPr algn="l" indent="0" marL="0">
-              <a:lnSpc>
-                <a:spcPts val="1680"/>
-              </a:lnSpc>
-              <a:spcBef>
-                <a:spcPts val="300"/>
-              </a:spcBef>
-              <a:spcAft>
-                <a:spcPts val="300"/>
-              </a:spcAft>
-              <a:buNone/>
-            </a:pPr>
-            <a:r>
-              <a:rPr lang="en-US" sz="1200" dirty="0">
-                <a:solidFill>
-                  <a:srgbClr val="1C2833"/>
-                </a:solidFill>
-                <a:latin typeface="Arial" pitchFamily="34" charset="0"/>
-                <a:ea typeface="Arial" pitchFamily="34" charset="-122"/>
-                <a:cs typeface="Arial" pitchFamily="34" charset="-120"/>
-              </a:rPr>
-              <a:t> – Pair A demos routine to Pair B (mat-side). Pair B lies in the role of the target audience and tries to follow. – 5 min run + 2 min feedback. Swap. Total ~14 min for round.</a:t>
-            </a:r>
-            <a:endParaRPr lang="en-US" sz="1200" dirty="0"/>
-          </a:p>
-        </p:txBody>
-      </p:sp>
-      <p:sp>
-        <p:nvSpPr>
-          <p:cNvPr id="6" name="Text 4"/>
           <p:cNvSpPr/>
           <p:nvPr/>
         </p:nvSpPr>
@@ -3579,7 +4121,7 @@
                 <a:ea typeface="Georgia" pitchFamily="34" charset="-122"/>
                 <a:cs typeface="Georgia" pitchFamily="34" charset="-120"/>
               </a:rPr>
-              <a:t>Wrap-up (5 min)</a:t>
+              <a:t>Core (30 min) — Two halves</a:t>
             </a:r>
             <a:endParaRPr lang="en-US" sz="1800" dirty="0"/>
           </a:p>
@@ -3594,7 +4136,7 @@
         <p:spPr>
           <a:xfrm>
             <a:off x="406301" y="870942"/>
-            <a:ext cx="8498026" cy="426541"/>
+            <a:ext cx="8498026" cy="213271"/>
           </a:xfrm>
           <a:prstGeom prst="rect">
             <a:avLst/>
@@ -3619,7 +4161,7 @@
               <a:buNone/>
             </a:pPr>
             <a:r>
-              <a:rPr lang="en-US" sz="1200" dirty="0">
+              <a:rPr lang="en-US" sz="1200" b="1" dirty="0">
                 <a:solidFill>
                   <a:srgbClr val="1C2833"/>
                 </a:solidFill>
@@ -3627,7 +4169,7 @@
                 <a:ea typeface="Arial" pitchFamily="34" charset="-122"/>
                 <a:cs typeface="Arial" pitchFamily="34" charset="-120"/>
               </a:rPr>
-              <a:t>– One-sentence share: "What's the one thing I'm changing before tomorrow?" – Tomorrow: full presentations + summative quiz.</a:t>
+              <a:t>Half 1 (15 min) — Refine.</a:t>
             </a:r>
             <a:endParaRPr lang="en-US" sz="1200" dirty="0"/>
           </a:p>
@@ -3636,6 +4178,196 @@
       <p:sp>
         <p:nvSpPr>
           <p:cNvPr id="5" name="Text 3"/>
+          <p:cNvSpPr/>
+          <p:nvPr/>
+        </p:nvSpPr>
+        <p:spPr>
+          <a:xfrm>
+            <a:off x="634901" y="1173063"/>
+            <a:ext cx="8102798" cy="1744563"/>
+          </a:xfrm>
+          <a:prstGeom prst="rect">
+            <a:avLst/>
+          </a:prstGeom>
+          <a:noFill/>
+          <a:ln/>
+        </p:spPr>
+        <p:txBody>
+          <a:bodyPr wrap="square" lIns="0" tIns="0" rIns="0" bIns="0" rtlCol="0" anchor="t"/>
+          <a:lstStyle/>
+          <a:p>
+            <a:pPr algn="l" marL="342900" indent="-342900">
+              <a:lnSpc>
+                <a:spcPts val="1620"/>
+              </a:lnSpc>
+              <a:spcAft>
+                <a:spcPts val="300"/>
+              </a:spcAft>
+              <a:buSzPct val="100000"/>
+              <a:buChar char="•"/>
+            </a:pPr>
+            <a:r>
+              <a:rPr lang="en-US" sz="1200" dirty="0">
+                <a:solidFill>
+                  <a:srgbClr val="1C2833"/>
+                </a:solidFill>
+                <a:latin typeface="Arial" pitchFamily="34" charset="0"/>
+                <a:ea typeface="Arial" pitchFamily="34" charset="-122"/>
+                <a:cs typeface="Arial" pitchFamily="34" charset="-120"/>
+              </a:rPr>
+              <a:t>Each pair runs their routine once on their own mats, timed.</a:t>
+            </a:r>
+            <a:endParaRPr lang="en-US" sz="1200" dirty="0"/>
+          </a:p>
+          <a:p>
+            <a:pPr algn="l" marL="342900" indent="-342900">
+              <a:lnSpc>
+                <a:spcPts val="1620"/>
+              </a:lnSpc>
+              <a:spcAft>
+                <a:spcPts val="300"/>
+              </a:spcAft>
+              <a:buSzPct val="100000"/>
+              <a:buChar char="•"/>
+            </a:pPr>
+            <a:r>
+              <a:rPr lang="en-US" sz="1200" dirty="0">
+                <a:solidFill>
+                  <a:srgbClr val="1C2833"/>
+                </a:solidFill>
+                <a:latin typeface="Arial" pitchFamily="34" charset="0"/>
+                <a:ea typeface="Arial" pitchFamily="34" charset="-122"/>
+                <a:cs typeface="Arial" pitchFamily="34" charset="-120"/>
+              </a:rPr>
+              <a:t>Teacher rotates: 60 sec per pair, focused question: "Where does the energy of your routine drop?"</a:t>
+            </a:r>
+            <a:endParaRPr lang="en-US" sz="1200" dirty="0"/>
+          </a:p>
+          <a:p>
+            <a:pPr algn="l" marL="342900" indent="-342900">
+              <a:lnSpc>
+                <a:spcPts val="1620"/>
+              </a:lnSpc>
+              <a:spcAft>
+                <a:spcPts val="300"/>
+              </a:spcAft>
+              <a:buSzPct val="100000"/>
+              <a:buChar char="•"/>
+            </a:pPr>
+            <a:r>
+              <a:rPr lang="en-US" sz="1200" dirty="0">
+                <a:solidFill>
+                  <a:srgbClr val="1C2833"/>
+                </a:solidFill>
+                <a:latin typeface="Arial" pitchFamily="34" charset="0"/>
+                <a:ea typeface="Arial" pitchFamily="34" charset="-122"/>
+                <a:cs typeface="Arial" pitchFamily="34" charset="-120"/>
+              </a:rPr>
+              <a:t>Common adjustments to flag:</a:t>
+            </a:r>
+            <a:endParaRPr lang="en-US" sz="1200" dirty="0"/>
+          </a:p>
+          <a:p>
+            <a:pPr algn="l" marL="342900" indent="-342900">
+              <a:lnSpc>
+                <a:spcPts val="1620"/>
+              </a:lnSpc>
+              <a:spcAft>
+                <a:spcPts val="300"/>
+              </a:spcAft>
+              <a:buSzPct val="100000"/>
+              <a:buChar char="•"/>
+            </a:pPr>
+            <a:r>
+              <a:rPr lang="en-US" sz="1200" dirty="0">
+                <a:solidFill>
+                  <a:srgbClr val="1C2833"/>
+                </a:solidFill>
+                <a:latin typeface="Arial" pitchFamily="34" charset="0"/>
+                <a:ea typeface="Arial" pitchFamily="34" charset="-122"/>
+                <a:cs typeface="Arial" pitchFamily="34" charset="-120"/>
+              </a:rPr>
+              <a:t>Pace too fast — students rush through poses.</a:t>
+            </a:r>
+            <a:endParaRPr lang="en-US" sz="1200" dirty="0"/>
+          </a:p>
+          <a:p>
+            <a:pPr algn="l" marL="342900" indent="-342900">
+              <a:lnSpc>
+                <a:spcPts val="1620"/>
+              </a:lnSpc>
+              <a:spcAft>
+                <a:spcPts val="300"/>
+              </a:spcAft>
+              <a:buSzPct val="100000"/>
+              <a:buChar char="•"/>
+            </a:pPr>
+            <a:r>
+              <a:rPr lang="en-US" sz="1200" dirty="0">
+                <a:solidFill>
+                  <a:srgbClr val="1C2833"/>
+                </a:solidFill>
+                <a:latin typeface="Arial" pitchFamily="34" charset="0"/>
+                <a:ea typeface="Arial" pitchFamily="34" charset="-122"/>
+                <a:cs typeface="Arial" pitchFamily="34" charset="-120"/>
+              </a:rPr>
+              <a:t>Breath cues missing.</a:t>
+            </a:r>
+            <a:endParaRPr lang="en-US" sz="1200" dirty="0"/>
+          </a:p>
+          <a:p>
+            <a:pPr algn="l" marL="342900" indent="-342900">
+              <a:lnSpc>
+                <a:spcPts val="1620"/>
+              </a:lnSpc>
+              <a:spcAft>
+                <a:spcPts val="300"/>
+              </a:spcAft>
+              <a:buSzPct val="100000"/>
+              <a:buChar char="•"/>
+            </a:pPr>
+            <a:r>
+              <a:rPr lang="en-US" sz="1200" dirty="0">
+                <a:solidFill>
+                  <a:srgbClr val="1C2833"/>
+                </a:solidFill>
+                <a:latin typeface="Arial" pitchFamily="34" charset="0"/>
+                <a:ea typeface="Arial" pitchFamily="34" charset="-122"/>
+                <a:cs typeface="Arial" pitchFamily="34" charset="-120"/>
+              </a:rPr>
+              <a:t>Transitions clunky.</a:t>
+            </a:r>
+            <a:endParaRPr lang="en-US" sz="1200" dirty="0"/>
+          </a:p>
+          <a:p>
+            <a:pPr algn="l" marL="342900" indent="-342900">
+              <a:lnSpc>
+                <a:spcPts val="1620"/>
+              </a:lnSpc>
+              <a:spcAft>
+                <a:spcPts val="300"/>
+              </a:spcAft>
+              <a:buSzPct val="100000"/>
+              <a:buChar char="•"/>
+            </a:pPr>
+            <a:r>
+              <a:rPr lang="en-US" sz="1200" dirty="0">
+                <a:solidFill>
+                  <a:srgbClr val="1C2833"/>
+                </a:solidFill>
+                <a:latin typeface="Arial" pitchFamily="34" charset="0"/>
+                <a:ea typeface="Arial" pitchFamily="34" charset="-122"/>
+                <a:cs typeface="Arial" pitchFamily="34" charset="-120"/>
+              </a:rPr>
+              <a:t>Source citation forgotten — must be spoken aloud.</a:t>
+            </a:r>
+            <a:endParaRPr lang="en-US" sz="1200" dirty="0"/>
+          </a:p>
+        </p:txBody>
+      </p:sp>
+      <p:sp>
+        <p:nvSpPr>
+          <p:cNvPr id="6" name="Text 4"/>
           <p:cNvSpPr/>
           <p:nvPr/>
         </p:nvSpPr>
@@ -3785,7 +4517,7 @@
                 <a:ea typeface="Georgia" pitchFamily="34" charset="-122"/>
                 <a:cs typeface="Georgia" pitchFamily="34" charset="-120"/>
               </a:rPr>
-              <a:t>Student-facing content</a:t>
+              <a:t>Core (30 min) — Two halves (cont.)</a:t>
             </a:r>
             <a:endParaRPr lang="en-US" sz="1800" dirty="0"/>
           </a:p>
@@ -3799,198 +4531,119 @@
         </p:nvSpPr>
         <p:spPr>
           <a:xfrm>
-            <a:off x="406301" y="883593"/>
-            <a:ext cx="8331398" cy="1612106"/>
-          </a:xfrm>
-          <a:prstGeom prst="rect">
-            <a:avLst/>
-          </a:prstGeom>
-          <a:solidFill>
-            <a:srgbClr val="F4F8F9"/>
-          </a:solidFill>
-          <a:ln/>
-        </p:spPr>
-        <p:txBody>
-          <a:bodyPr wrap="square" rtlCol="0" anchor="ctr"/>
-          <a:lstStyle/>
-          <a:p>
-            <a:pPr indent="0" marL="0">
-              <a:buNone/>
-            </a:pPr>
-            <a:endParaRPr lang="en-US" dirty="0"/>
-          </a:p>
-        </p:txBody>
-      </p:sp>
-      <p:sp>
-        <p:nvSpPr>
-          <p:cNvPr id="5" name="Shape 3"/>
-          <p:cNvSpPr/>
-          <p:nvPr/>
-        </p:nvSpPr>
-        <p:spPr>
-          <a:xfrm>
-            <a:off x="434876" y="883593"/>
-            <a:ext cx="0" cy="1612106"/>
-          </a:xfrm>
-          <a:prstGeom prst="line">
+            <a:off x="406301" y="870942"/>
+            <a:ext cx="8498026" cy="213271"/>
+          </a:xfrm>
+          <a:prstGeom prst="rect">
             <a:avLst/>
           </a:prstGeom>
           <a:noFill/>
-          <a:ln w="57150">
-            <a:solidFill>
-              <a:srgbClr val="FE4447"/>
-            </a:solidFill>
-            <a:prstDash val="solid"/>
-          </a:ln>
-        </p:spPr>
+          <a:ln/>
+        </p:spPr>
+        <p:txBody>
+          <a:bodyPr wrap="square" lIns="0" tIns="0" rIns="0" bIns="0" rtlCol="0" anchor="t"/>
+          <a:lstStyle/>
+          <a:p>
+            <a:pPr algn="l" indent="0" marL="0">
+              <a:lnSpc>
+                <a:spcPts val="1680"/>
+              </a:lnSpc>
+              <a:spcBef>
+                <a:spcPts val="300"/>
+              </a:spcBef>
+              <a:spcAft>
+                <a:spcPts val="300"/>
+              </a:spcAft>
+              <a:buNone/>
+            </a:pPr>
+            <a:r>
+              <a:rPr lang="en-US" sz="1200" b="1" dirty="0">
+                <a:solidFill>
+                  <a:srgbClr val="1C2833"/>
+                </a:solidFill>
+                <a:latin typeface="Arial" pitchFamily="34" charset="0"/>
+                <a:ea typeface="Arial" pitchFamily="34" charset="-122"/>
+                <a:cs typeface="Arial" pitchFamily="34" charset="-120"/>
+              </a:rPr>
+              <a:t>Half 2 (15 min) — Buddy rehearsal.</a:t>
+            </a:r>
+            <a:endParaRPr lang="en-US" sz="1200" dirty="0"/>
+          </a:p>
+        </p:txBody>
+      </p:sp>
+      <p:sp>
+        <p:nvSpPr>
+          <p:cNvPr id="5" name="Text 3"/>
+          <p:cNvSpPr/>
+          <p:nvPr/>
+        </p:nvSpPr>
+        <p:spPr>
+          <a:xfrm>
+            <a:off x="634901" y="1173063"/>
+            <a:ext cx="8102798" cy="525661"/>
+          </a:xfrm>
+          <a:prstGeom prst="rect">
+            <a:avLst/>
+          </a:prstGeom>
+          <a:noFill/>
+          <a:ln/>
+        </p:spPr>
+        <p:txBody>
+          <a:bodyPr wrap="square" lIns="0" tIns="0" rIns="0" bIns="0" rtlCol="0" anchor="t"/>
+          <a:lstStyle/>
+          <a:p>
+            <a:pPr algn="l" marL="342900" indent="-342900">
+              <a:lnSpc>
+                <a:spcPts val="1620"/>
+              </a:lnSpc>
+              <a:spcAft>
+                <a:spcPts val="300"/>
+              </a:spcAft>
+              <a:buSzPct val="100000"/>
+              <a:buChar char="•"/>
+            </a:pPr>
+            <a:r>
+              <a:rPr lang="en-US" sz="1200" dirty="0">
+                <a:solidFill>
+                  <a:srgbClr val="1C2833"/>
+                </a:solidFill>
+                <a:latin typeface="Arial" pitchFamily="34" charset="0"/>
+                <a:ea typeface="Arial" pitchFamily="34" charset="-122"/>
+                <a:cs typeface="Arial" pitchFamily="34" charset="-120"/>
+              </a:rPr>
+              <a:t>Pair A demos routine to Pair B (mat-side). Pair B lies in the role of the target audience and tries to follow.</a:t>
+            </a:r>
+            <a:endParaRPr lang="en-US" sz="1200" dirty="0"/>
+          </a:p>
+          <a:p>
+            <a:pPr algn="l" marL="342900" indent="-342900">
+              <a:lnSpc>
+                <a:spcPts val="1620"/>
+              </a:lnSpc>
+              <a:spcAft>
+                <a:spcPts val="300"/>
+              </a:spcAft>
+              <a:buSzPct val="100000"/>
+              <a:buChar char="•"/>
+            </a:pPr>
+            <a:r>
+              <a:rPr lang="en-US" sz="1200" dirty="0">
+                <a:solidFill>
+                  <a:srgbClr val="1C2833"/>
+                </a:solidFill>
+                <a:latin typeface="Arial" pitchFamily="34" charset="0"/>
+                <a:ea typeface="Arial" pitchFamily="34" charset="-122"/>
+                <a:cs typeface="Arial" pitchFamily="34" charset="-120"/>
+              </a:rPr>
+              <a:t>5 min run + 2 min feedback. Swap. Total ~14 min for round.</a:t>
+            </a:r>
+            <a:endParaRPr lang="en-US" sz="1200" dirty="0"/>
+          </a:p>
+        </p:txBody>
       </p:sp>
       <p:sp>
         <p:nvSpPr>
           <p:cNvPr id="6" name="Text 4"/>
-          <p:cNvSpPr/>
-          <p:nvPr/>
-        </p:nvSpPr>
-        <p:spPr>
-          <a:xfrm>
-            <a:off x="692051" y="1074093"/>
-            <a:ext cx="7973389" cy="230981"/>
-          </a:xfrm>
-          <a:prstGeom prst="rect">
-            <a:avLst/>
-          </a:prstGeom>
-          <a:noFill/>
-          <a:ln/>
-        </p:spPr>
-        <p:txBody>
-          <a:bodyPr wrap="square" lIns="0" tIns="0" rIns="0" bIns="0" rtlCol="0" anchor="t"/>
-          <a:lstStyle/>
-          <a:p>
-            <a:pPr algn="l" indent="0" marL="0">
-              <a:lnSpc>
-                <a:spcPts val="1820"/>
-              </a:lnSpc>
-              <a:spcBef>
-                <a:spcPts val="300"/>
-              </a:spcBef>
-              <a:spcAft>
-                <a:spcPts val="300"/>
-              </a:spcAft>
-              <a:buNone/>
-            </a:pPr>
-            <a:r>
-              <a:rPr lang="en-US" sz="1300" b="1" i="1" dirty="0">
-                <a:solidFill>
-                  <a:srgbClr val="1C2833"/>
-                </a:solidFill>
-                <a:latin typeface="Georgia" pitchFamily="34" charset="0"/>
-                <a:ea typeface="Georgia" pitchFamily="34" charset="-122"/>
-                <a:cs typeface="Georgia" pitchFamily="34" charset="-120"/>
-              </a:rPr>
-              <a:t>Project workshop — Session 2: Refine + Rehearse</a:t>
-            </a:r>
-            <a:endParaRPr lang="en-US" sz="1300" dirty="0"/>
-          </a:p>
-        </p:txBody>
-      </p:sp>
-      <p:sp>
-        <p:nvSpPr>
-          <p:cNvPr id="7" name="Text 5"/>
-          <p:cNvSpPr/>
-          <p:nvPr/>
-        </p:nvSpPr>
-        <p:spPr>
-          <a:xfrm>
-            <a:off x="692051" y="1343174"/>
-            <a:ext cx="7973389" cy="692944"/>
-          </a:xfrm>
-          <a:prstGeom prst="rect">
-            <a:avLst/>
-          </a:prstGeom>
-          <a:noFill/>
-          <a:ln/>
-        </p:spPr>
-        <p:txBody>
-          <a:bodyPr wrap="square" lIns="0" tIns="0" rIns="0" bIns="0" rtlCol="0" anchor="t"/>
-          <a:lstStyle/>
-          <a:p>
-            <a:pPr algn="l" indent="0" marL="0">
-              <a:lnSpc>
-                <a:spcPts val="1820"/>
-              </a:lnSpc>
-              <a:spcBef>
-                <a:spcPts val="300"/>
-              </a:spcBef>
-              <a:spcAft>
-                <a:spcPts val="300"/>
-              </a:spcAft>
-              <a:buNone/>
-            </a:pPr>
-            <a:r>
-              <a:rPr lang="en-US" sz="1300" i="1" dirty="0">
-                <a:solidFill>
-                  <a:srgbClr val="1C2833"/>
-                </a:solidFill>
-                <a:latin typeface="Georgia" pitchFamily="34" charset="0"/>
-                <a:ea typeface="Georgia" pitchFamily="34" charset="-122"/>
-                <a:cs typeface="Georgia" pitchFamily="34" charset="-120"/>
-              </a:rPr>
-              <a:t>Checklist: - [ ] My routine fits in 5 min ± 30 sec. - [ ] I cite at least one source aloud (during intro or close). - [ ] My breath cues are clear. - [ ] My partner and I know who leads which pose. - [ ] I've heard feedback from one buddy pair and decided what to change.</a:t>
-            </a:r>
-            <a:endParaRPr lang="en-US" sz="1300" dirty="0"/>
-          </a:p>
-        </p:txBody>
-      </p:sp>
-      <p:sp>
-        <p:nvSpPr>
-          <p:cNvPr id="8" name="Text 6"/>
-          <p:cNvSpPr/>
-          <p:nvPr/>
-        </p:nvSpPr>
-        <p:spPr>
-          <a:xfrm>
-            <a:off x="692051" y="2074218"/>
-            <a:ext cx="7973389" cy="230981"/>
-          </a:xfrm>
-          <a:prstGeom prst="rect">
-            <a:avLst/>
-          </a:prstGeom>
-          <a:noFill/>
-          <a:ln/>
-        </p:spPr>
-        <p:txBody>
-          <a:bodyPr wrap="square" lIns="0" tIns="0" rIns="0" bIns="0" rtlCol="0" anchor="t"/>
-          <a:lstStyle/>
-          <a:p>
-            <a:pPr algn="l" indent="0" marL="0">
-              <a:lnSpc>
-                <a:spcPts val="1820"/>
-              </a:lnSpc>
-              <a:spcBef>
-                <a:spcPts val="300"/>
-              </a:spcBef>
-              <a:spcAft>
-                <a:spcPts val="300"/>
-              </a:spcAft>
-              <a:buNone/>
-            </a:pPr>
-            <a:r>
-              <a:rPr lang="en-US" sz="1300" i="1" dirty="0">
-                <a:solidFill>
-                  <a:srgbClr val="1C2833"/>
-                </a:solidFill>
-                <a:latin typeface="Georgia" pitchFamily="34" charset="0"/>
-                <a:ea typeface="Georgia" pitchFamily="34" charset="-122"/>
-                <a:cs typeface="Georgia" pitchFamily="34" charset="-120"/>
-              </a:rPr>
-              <a:t>Tomorrow you teach the class.</a:t>
-            </a:r>
-            <a:endParaRPr lang="en-US" sz="1300" dirty="0"/>
-          </a:p>
-        </p:txBody>
-      </p:sp>
-      <p:sp>
-        <p:nvSpPr>
-          <p:cNvPr id="9" name="Text 7"/>
           <p:cNvSpPr/>
           <p:nvPr/>
         </p:nvSpPr>
@@ -4140,7 +4793,7 @@
                 <a:ea typeface="Georgia" pitchFamily="34" charset="-122"/>
                 <a:cs typeface="Georgia" pitchFamily="34" charset="-120"/>
               </a:rPr>
-              <a:t>Homework</a:t>
+              <a:t>Wrap-up (5 min)</a:t>
             </a:r>
             <a:endParaRPr lang="en-US" sz="1800" dirty="0"/>
           </a:p>
@@ -4154,8 +4807,8 @@
         </p:nvSpPr>
         <p:spPr>
           <a:xfrm>
-            <a:off x="406301" y="870942"/>
-            <a:ext cx="8498026" cy="213271"/>
+            <a:off x="634901" y="883593"/>
+            <a:ext cx="8102798" cy="525661"/>
           </a:xfrm>
           <a:prstGeom prst="rect">
             <a:avLst/>
@@ -4167,17 +4820,15 @@
           <a:bodyPr wrap="square" lIns="0" tIns="0" rIns="0" bIns="0" rtlCol="0" anchor="t"/>
           <a:lstStyle/>
           <a:p>
-            <a:pPr algn="l" indent="0" marL="0">
-              <a:lnSpc>
-                <a:spcPts val="1680"/>
-              </a:lnSpc>
-              <a:spcBef>
-                <a:spcPts val="300"/>
-              </a:spcBef>
-              <a:spcAft>
-                <a:spcPts val="300"/>
-              </a:spcAft>
-              <a:buNone/>
+            <a:pPr algn="l" marL="342900" indent="-342900">
+              <a:lnSpc>
+                <a:spcPts val="1620"/>
+              </a:lnSpc>
+              <a:spcAft>
+                <a:spcPts val="300"/>
+              </a:spcAft>
+              <a:buSzPct val="100000"/>
+              <a:buChar char="•"/>
             </a:pPr>
             <a:r>
               <a:rPr lang="en-US" sz="1200" dirty="0">
@@ -4188,7 +4839,31 @@
                 <a:ea typeface="Arial" pitchFamily="34" charset="-122"/>
                 <a:cs typeface="Arial" pitchFamily="34" charset="-120"/>
               </a:rPr>
-              <a:t>– Practise the full routine one more time. Bring everything tomorrow.</a:t>
+              <a:t>One-sentence share: "What's the one thing I'm changing before tomorrow?"</a:t>
+            </a:r>
+            <a:endParaRPr lang="en-US" sz="1200" dirty="0"/>
+          </a:p>
+          <a:p>
+            <a:pPr algn="l" marL="342900" indent="-342900">
+              <a:lnSpc>
+                <a:spcPts val="1620"/>
+              </a:lnSpc>
+              <a:spcAft>
+                <a:spcPts val="300"/>
+              </a:spcAft>
+              <a:buSzPct val="100000"/>
+              <a:buChar char="•"/>
+            </a:pPr>
+            <a:r>
+              <a:rPr lang="en-US" sz="1200" dirty="0">
+                <a:solidFill>
+                  <a:srgbClr val="1C2833"/>
+                </a:solidFill>
+                <a:latin typeface="Arial" pitchFamily="34" charset="0"/>
+                <a:ea typeface="Arial" pitchFamily="34" charset="-122"/>
+                <a:cs typeface="Arial" pitchFamily="34" charset="-120"/>
+              </a:rPr>
+              <a:t>Tomorrow: full presentations + summative quiz.</a:t>
             </a:r>
             <a:endParaRPr lang="en-US" sz="1200" dirty="0"/>
           </a:p>
@@ -4346,7 +5021,7 @@
                 <a:ea typeface="Georgia" pitchFamily="34" charset="-122"/>
                 <a:cs typeface="Georgia" pitchFamily="34" charset="-120"/>
               </a:rPr>
-              <a:t>Differentiation</a:t>
+              <a:t>Student-facing content</a:t>
             </a:r>
             <a:endParaRPr lang="en-US" sz="1800" dirty="0"/>
           </a:p>
@@ -4360,111 +5035,438 @@
         </p:nvSpPr>
         <p:spPr>
           <a:xfrm>
-            <a:off x="634901" y="883593"/>
-            <a:ext cx="8102798" cy="525661"/>
-          </a:xfrm>
-          <a:prstGeom prst="rect">
+            <a:off x="406301" y="883593"/>
+            <a:ext cx="8331398" cy="2495550"/>
+          </a:xfrm>
+          <a:prstGeom prst="rect">
+            <a:avLst/>
+          </a:prstGeom>
+          <a:solidFill>
+            <a:srgbClr val="F4F8F9"/>
+          </a:solidFill>
+          <a:ln/>
+        </p:spPr>
+        <p:txBody>
+          <a:bodyPr wrap="square" rtlCol="0" anchor="ctr"/>
+          <a:lstStyle/>
+          <a:p>
+            <a:pPr indent="0" marL="0">
+              <a:buNone/>
+            </a:pPr>
+            <a:endParaRPr lang="en-US" dirty="0"/>
+          </a:p>
+        </p:txBody>
+      </p:sp>
+      <p:sp>
+        <p:nvSpPr>
+          <p:cNvPr id="5" name="Shape 3"/>
+          <p:cNvSpPr/>
+          <p:nvPr/>
+        </p:nvSpPr>
+        <p:spPr>
+          <a:xfrm>
+            <a:off x="434876" y="883593"/>
+            <a:ext cx="0" cy="2495550"/>
+          </a:xfrm>
+          <a:prstGeom prst="line">
             <a:avLst/>
           </a:prstGeom>
           <a:noFill/>
+          <a:ln w="57150">
+            <a:solidFill>
+              <a:srgbClr val="FE4447"/>
+            </a:solidFill>
+            <a:prstDash val="solid"/>
+          </a:ln>
+        </p:spPr>
+      </p:sp>
+      <p:sp>
+        <p:nvSpPr>
+          <p:cNvPr id="6" name="Text 4"/>
+          <p:cNvSpPr/>
+          <p:nvPr/>
+        </p:nvSpPr>
+        <p:spPr>
+          <a:xfrm>
+            <a:off x="692051" y="1074093"/>
+            <a:ext cx="7973389" cy="230981"/>
+          </a:xfrm>
+          <a:prstGeom prst="rect">
+            <a:avLst/>
+          </a:prstGeom>
+          <a:noFill/>
           <a:ln/>
         </p:spPr>
         <p:txBody>
           <a:bodyPr wrap="square" lIns="0" tIns="0" rIns="0" bIns="0" rtlCol="0" anchor="t"/>
           <a:lstStyle/>
           <a:p>
-            <a:pPr algn="l" marL="342900" indent="-342900">
-              <a:lnSpc>
-                <a:spcPts val="1620"/>
-              </a:lnSpc>
-              <a:spcAft>
-                <a:spcPts val="300"/>
-              </a:spcAft>
-              <a:buSzPct val="100000"/>
-              <a:buChar char="•"/>
-            </a:pPr>
-            <a:r>
-              <a:rPr lang="en-US" sz="1200" b="1" dirty="0">
+            <a:pPr algn="l" indent="0" marL="0">
+              <a:lnSpc>
+                <a:spcPts val="1820"/>
+              </a:lnSpc>
+              <a:spcBef>
+                <a:spcPts val="300"/>
+              </a:spcBef>
+              <a:spcAft>
+                <a:spcPts val="300"/>
+              </a:spcAft>
+              <a:buNone/>
+            </a:pPr>
+            <a:r>
+              <a:rPr lang="en-US" sz="1300" b="1" i="1" dirty="0">
                 <a:solidFill>
                   <a:srgbClr val="1C2833"/>
                 </a:solidFill>
-                <a:latin typeface="Arial" pitchFamily="34" charset="0"/>
-                <a:ea typeface="Arial" pitchFamily="34" charset="-122"/>
-                <a:cs typeface="Arial" pitchFamily="34" charset="-120"/>
-              </a:rPr>
-              <a:t>Tier up:</a:t>
-            </a:r>
+                <a:latin typeface="Georgia" pitchFamily="34" charset="0"/>
+                <a:ea typeface="Georgia" pitchFamily="34" charset="-122"/>
+                <a:cs typeface="Georgia" pitchFamily="34" charset="-120"/>
+              </a:rPr>
+              <a:t>Project workshop — Session 2: Refine + Rehearse</a:t>
+            </a:r>
+            <a:endParaRPr lang="en-US" sz="1300" dirty="0"/>
+          </a:p>
+        </p:txBody>
+      </p:sp>
+      <p:sp>
+        <p:nvSpPr>
+          <p:cNvPr id="7" name="Text 5"/>
+          <p:cNvSpPr/>
+          <p:nvPr/>
+        </p:nvSpPr>
+        <p:spPr>
+          <a:xfrm>
+            <a:off x="692051" y="1343174"/>
+            <a:ext cx="7973389" cy="230981"/>
+          </a:xfrm>
+          <a:prstGeom prst="rect">
+            <a:avLst/>
+          </a:prstGeom>
+          <a:noFill/>
+          <a:ln/>
+        </p:spPr>
+        <p:txBody>
+          <a:bodyPr wrap="square" lIns="0" tIns="0" rIns="0" bIns="0" rtlCol="0" anchor="t"/>
+          <a:lstStyle/>
+          <a:p>
             <a:pPr algn="l" indent="0" marL="0">
               <a:lnSpc>
-                <a:spcPts val="1620"/>
-              </a:lnSpc>
-              <a:spcAft>
-                <a:spcPts val="300"/>
-              </a:spcAft>
-              <a:buNone/>
-            </a:pPr>
-            <a:r>
-              <a:rPr lang="en-US" sz="1200" dirty="0">
+                <a:spcPts val="1820"/>
+              </a:lnSpc>
+              <a:spcBef>
+                <a:spcPts val="300"/>
+              </a:spcBef>
+              <a:spcAft>
+                <a:spcPts val="300"/>
+              </a:spcAft>
+              <a:buNone/>
+            </a:pPr>
+            <a:r>
+              <a:rPr lang="en-US" sz="1300" i="1" dirty="0">
                 <a:solidFill>
                   <a:srgbClr val="1C2833"/>
                 </a:solidFill>
-                <a:latin typeface="Arial" pitchFamily="34" charset="0"/>
-                <a:ea typeface="Arial" pitchFamily="34" charset="-122"/>
-                <a:cs typeface="Arial" pitchFamily="34" charset="-120"/>
-              </a:rPr>
-              <a:t> Add a memorable 1-line "takeaway" the audience will remember after the 5 min.</a:t>
-            </a:r>
-            <a:endParaRPr lang="en-US" sz="1200" dirty="0"/>
-          </a:p>
-          <a:p>
-            <a:pPr algn="l" marL="342900" indent="-342900">
-              <a:lnSpc>
-                <a:spcPts val="1620"/>
-              </a:lnSpc>
-              <a:spcAft>
-                <a:spcPts val="300"/>
-              </a:spcAft>
-              <a:buSzPct val="100000"/>
-              <a:buChar char="•"/>
-            </a:pPr>
-            <a:r>
-              <a:rPr lang="en-US" sz="1200" b="1" dirty="0">
+                <a:latin typeface="Georgia" pitchFamily="34" charset="0"/>
+                <a:ea typeface="Georgia" pitchFamily="34" charset="-122"/>
+                <a:cs typeface="Georgia" pitchFamily="34" charset="-120"/>
+              </a:rPr>
+              <a:t>Checklist:</a:t>
+            </a:r>
+            <a:endParaRPr lang="en-US" sz="1300" dirty="0"/>
+          </a:p>
+        </p:txBody>
+      </p:sp>
+      <p:sp>
+        <p:nvSpPr>
+          <p:cNvPr id="8" name="Text 6"/>
+          <p:cNvSpPr/>
+          <p:nvPr/>
+        </p:nvSpPr>
+        <p:spPr>
+          <a:xfrm>
+            <a:off x="692051" y="1612255"/>
+            <a:ext cx="7973389" cy="230981"/>
+          </a:xfrm>
+          <a:prstGeom prst="rect">
+            <a:avLst/>
+          </a:prstGeom>
+          <a:noFill/>
+          <a:ln/>
+        </p:spPr>
+        <p:txBody>
+          <a:bodyPr wrap="square" lIns="0" tIns="0" rIns="0" bIns="0" rtlCol="0" anchor="t"/>
+          <a:lstStyle/>
+          <a:p>
+            <a:pPr algn="l" indent="0" marL="0">
+              <a:lnSpc>
+                <a:spcPts val="1820"/>
+              </a:lnSpc>
+              <a:spcBef>
+                <a:spcPts val="300"/>
+              </a:spcBef>
+              <a:spcAft>
+                <a:spcPts val="300"/>
+              </a:spcAft>
+              <a:buNone/>
+            </a:pPr>
+            <a:r>
+              <a:rPr lang="en-US" sz="1300" i="1" dirty="0">
                 <a:solidFill>
                   <a:srgbClr val="1C2833"/>
                 </a:solidFill>
-                <a:latin typeface="Arial" pitchFamily="34" charset="0"/>
-                <a:ea typeface="Arial" pitchFamily="34" charset="-122"/>
-                <a:cs typeface="Arial" pitchFamily="34" charset="-120"/>
-              </a:rPr>
-              <a:t>Tier down:</a:t>
-            </a:r>
+                <a:latin typeface="Georgia" pitchFamily="34" charset="0"/>
+                <a:ea typeface="Georgia" pitchFamily="34" charset="-122"/>
+                <a:cs typeface="Georgia" pitchFamily="34" charset="-120"/>
+              </a:rPr>
+              <a:t>[ ] My routine fits in 5 min ± 30 sec.</a:t>
+            </a:r>
+            <a:endParaRPr lang="en-US" sz="1300" dirty="0"/>
+          </a:p>
+        </p:txBody>
+      </p:sp>
+      <p:sp>
+        <p:nvSpPr>
+          <p:cNvPr id="9" name="Text 7"/>
+          <p:cNvSpPr/>
+          <p:nvPr/>
+        </p:nvSpPr>
+        <p:spPr>
+          <a:xfrm>
+            <a:off x="692051" y="1881336"/>
+            <a:ext cx="7973389" cy="230981"/>
+          </a:xfrm>
+          <a:prstGeom prst="rect">
+            <a:avLst/>
+          </a:prstGeom>
+          <a:noFill/>
+          <a:ln/>
+        </p:spPr>
+        <p:txBody>
+          <a:bodyPr wrap="square" lIns="0" tIns="0" rIns="0" bIns="0" rtlCol="0" anchor="t"/>
+          <a:lstStyle/>
+          <a:p>
             <a:pPr algn="l" indent="0" marL="0">
               <a:lnSpc>
-                <a:spcPts val="1620"/>
-              </a:lnSpc>
-              <a:spcAft>
-                <a:spcPts val="300"/>
-              </a:spcAft>
-              <a:buNone/>
-            </a:pPr>
-            <a:r>
-              <a:rPr lang="en-US" sz="1200" dirty="0">
+                <a:spcPts val="1820"/>
+              </a:lnSpc>
+              <a:spcBef>
+                <a:spcPts val="300"/>
+              </a:spcBef>
+              <a:spcAft>
+                <a:spcPts val="300"/>
+              </a:spcAft>
+              <a:buNone/>
+            </a:pPr>
+            <a:r>
+              <a:rPr lang="en-US" sz="1300" i="1" dirty="0">
                 <a:solidFill>
                   <a:srgbClr val="1C2833"/>
                 </a:solidFill>
-                <a:latin typeface="Arial" pitchFamily="34" charset="0"/>
-                <a:ea typeface="Arial" pitchFamily="34" charset="-122"/>
-                <a:cs typeface="Arial" pitchFamily="34" charset="-120"/>
-              </a:rPr>
-              <a:t> Reduce to 3 poses + 1 breath segment if 4–5 poses isn't sticking.</a:t>
-            </a:r>
-            <a:endParaRPr lang="en-US" sz="1200" dirty="0"/>
-          </a:p>
-        </p:txBody>
-      </p:sp>
-      <p:sp>
-        <p:nvSpPr>
-          <p:cNvPr id="5" name="Text 3"/>
+                <a:latin typeface="Georgia" pitchFamily="34" charset="0"/>
+                <a:ea typeface="Georgia" pitchFamily="34" charset="-122"/>
+                <a:cs typeface="Georgia" pitchFamily="34" charset="-120"/>
+              </a:rPr>
+              <a:t>[ ] I cite at least one source aloud (during intro or close).</a:t>
+            </a:r>
+            <a:endParaRPr lang="en-US" sz="1300" dirty="0"/>
+          </a:p>
+        </p:txBody>
+      </p:sp>
+      <p:sp>
+        <p:nvSpPr>
+          <p:cNvPr id="10" name="Text 8"/>
+          <p:cNvSpPr/>
+          <p:nvPr/>
+        </p:nvSpPr>
+        <p:spPr>
+          <a:xfrm>
+            <a:off x="692051" y="2150418"/>
+            <a:ext cx="7973389" cy="230981"/>
+          </a:xfrm>
+          <a:prstGeom prst="rect">
+            <a:avLst/>
+          </a:prstGeom>
+          <a:noFill/>
+          <a:ln/>
+        </p:spPr>
+        <p:txBody>
+          <a:bodyPr wrap="square" lIns="0" tIns="0" rIns="0" bIns="0" rtlCol="0" anchor="t"/>
+          <a:lstStyle/>
+          <a:p>
+            <a:pPr algn="l" indent="0" marL="0">
+              <a:lnSpc>
+                <a:spcPts val="1820"/>
+              </a:lnSpc>
+              <a:spcBef>
+                <a:spcPts val="300"/>
+              </a:spcBef>
+              <a:spcAft>
+                <a:spcPts val="300"/>
+              </a:spcAft>
+              <a:buNone/>
+            </a:pPr>
+            <a:r>
+              <a:rPr lang="en-US" sz="1300" i="1" dirty="0">
+                <a:solidFill>
+                  <a:srgbClr val="1C2833"/>
+                </a:solidFill>
+                <a:latin typeface="Georgia" pitchFamily="34" charset="0"/>
+                <a:ea typeface="Georgia" pitchFamily="34" charset="-122"/>
+                <a:cs typeface="Georgia" pitchFamily="34" charset="-120"/>
+              </a:rPr>
+              <a:t>[ ] My breath cues are clear.</a:t>
+            </a:r>
+            <a:endParaRPr lang="en-US" sz="1300" dirty="0"/>
+          </a:p>
+        </p:txBody>
+      </p:sp>
+      <p:sp>
+        <p:nvSpPr>
+          <p:cNvPr id="11" name="Text 9"/>
+          <p:cNvSpPr/>
+          <p:nvPr/>
+        </p:nvSpPr>
+        <p:spPr>
+          <a:xfrm>
+            <a:off x="692051" y="2419499"/>
+            <a:ext cx="7973389" cy="230981"/>
+          </a:xfrm>
+          <a:prstGeom prst="rect">
+            <a:avLst/>
+          </a:prstGeom>
+          <a:noFill/>
+          <a:ln/>
+        </p:spPr>
+        <p:txBody>
+          <a:bodyPr wrap="square" lIns="0" tIns="0" rIns="0" bIns="0" rtlCol="0" anchor="t"/>
+          <a:lstStyle/>
+          <a:p>
+            <a:pPr algn="l" indent="0" marL="0">
+              <a:lnSpc>
+                <a:spcPts val="1820"/>
+              </a:lnSpc>
+              <a:spcBef>
+                <a:spcPts val="300"/>
+              </a:spcBef>
+              <a:spcAft>
+                <a:spcPts val="300"/>
+              </a:spcAft>
+              <a:buNone/>
+            </a:pPr>
+            <a:r>
+              <a:rPr lang="en-US" sz="1300" i="1" dirty="0">
+                <a:solidFill>
+                  <a:srgbClr val="1C2833"/>
+                </a:solidFill>
+                <a:latin typeface="Georgia" pitchFamily="34" charset="0"/>
+                <a:ea typeface="Georgia" pitchFamily="34" charset="-122"/>
+                <a:cs typeface="Georgia" pitchFamily="34" charset="-120"/>
+              </a:rPr>
+              <a:t>[ ] My partner and I know who leads which pose.</a:t>
+            </a:r>
+            <a:endParaRPr lang="en-US" sz="1300" dirty="0"/>
+          </a:p>
+        </p:txBody>
+      </p:sp>
+      <p:sp>
+        <p:nvSpPr>
+          <p:cNvPr id="12" name="Text 10"/>
+          <p:cNvSpPr/>
+          <p:nvPr/>
+        </p:nvSpPr>
+        <p:spPr>
+          <a:xfrm>
+            <a:off x="692051" y="2688580"/>
+            <a:ext cx="7973389" cy="230981"/>
+          </a:xfrm>
+          <a:prstGeom prst="rect">
+            <a:avLst/>
+          </a:prstGeom>
+          <a:noFill/>
+          <a:ln/>
+        </p:spPr>
+        <p:txBody>
+          <a:bodyPr wrap="square" lIns="0" tIns="0" rIns="0" bIns="0" rtlCol="0" anchor="t"/>
+          <a:lstStyle/>
+          <a:p>
+            <a:pPr algn="l" indent="0" marL="0">
+              <a:lnSpc>
+                <a:spcPts val="1820"/>
+              </a:lnSpc>
+              <a:spcBef>
+                <a:spcPts val="300"/>
+              </a:spcBef>
+              <a:spcAft>
+                <a:spcPts val="300"/>
+              </a:spcAft>
+              <a:buNone/>
+            </a:pPr>
+            <a:r>
+              <a:rPr lang="en-US" sz="1300" i="1" dirty="0">
+                <a:solidFill>
+                  <a:srgbClr val="1C2833"/>
+                </a:solidFill>
+                <a:latin typeface="Georgia" pitchFamily="34" charset="0"/>
+                <a:ea typeface="Georgia" pitchFamily="34" charset="-122"/>
+                <a:cs typeface="Georgia" pitchFamily="34" charset="-120"/>
+              </a:rPr>
+              <a:t>[ ] I've heard feedback from one buddy pair and decided what to change.</a:t>
+            </a:r>
+            <a:endParaRPr lang="en-US" sz="1300" dirty="0"/>
+          </a:p>
+        </p:txBody>
+      </p:sp>
+      <p:sp>
+        <p:nvSpPr>
+          <p:cNvPr id="13" name="Text 11"/>
+          <p:cNvSpPr/>
+          <p:nvPr/>
+        </p:nvSpPr>
+        <p:spPr>
+          <a:xfrm>
+            <a:off x="692051" y="2957661"/>
+            <a:ext cx="7973389" cy="230981"/>
+          </a:xfrm>
+          <a:prstGeom prst="rect">
+            <a:avLst/>
+          </a:prstGeom>
+          <a:noFill/>
+          <a:ln/>
+        </p:spPr>
+        <p:txBody>
+          <a:bodyPr wrap="square" lIns="0" tIns="0" rIns="0" bIns="0" rtlCol="0" anchor="t"/>
+          <a:lstStyle/>
+          <a:p>
+            <a:pPr algn="l" indent="0" marL="0">
+              <a:lnSpc>
+                <a:spcPts val="1820"/>
+              </a:lnSpc>
+              <a:spcBef>
+                <a:spcPts val="300"/>
+              </a:spcBef>
+              <a:spcAft>
+                <a:spcPts val="300"/>
+              </a:spcAft>
+              <a:buNone/>
+            </a:pPr>
+            <a:r>
+              <a:rPr lang="en-US" sz="1300" i="1" dirty="0">
+                <a:solidFill>
+                  <a:srgbClr val="1C2833"/>
+                </a:solidFill>
+                <a:latin typeface="Georgia" pitchFamily="34" charset="0"/>
+                <a:ea typeface="Georgia" pitchFamily="34" charset="-122"/>
+                <a:cs typeface="Georgia" pitchFamily="34" charset="-120"/>
+              </a:rPr>
+              <a:t>Tomorrow you teach the class.</a:t>
+            </a:r>
+            <a:endParaRPr lang="en-US" sz="1300" dirty="0"/>
+          </a:p>
+        </p:txBody>
+      </p:sp>
+      <p:sp>
+        <p:nvSpPr>
+          <p:cNvPr id="14" name="Text 12"/>
           <p:cNvSpPr/>
           <p:nvPr/>
         </p:nvSpPr>
